--- a/CS3080_Project_Presentation.pptx
+++ b/CS3080_Project_Presentation.pptx
@@ -109,6 +109,11 @@
       </a:defRPr>
     </a:lvl9pPr>
   </p:defaultTextStyle>
+  <p:extLst>
+    <p:ext uri="{EFAFB233-063F-42B5-8137-9DF3F51BA10A}">
+      <p15:sldGuideLst xmlns:p15="http://schemas.microsoft.com/office/powerpoint/2012/main"/>
+    </p:ext>
+  </p:extLst>
 </p:presentation>
 </file>
 
@@ -259,7 +264,7 @@
           <a:p>
             <a:fld id="{4A227F7C-5135-49D1-B6CF-8F631C0E6D17}" type="datetimeFigureOut">
               <a:rPr lang="en-US" smtClean="0"/>
-              <a:t>5/3/2026</a:t>
+              <a:t>5/4/2026</a:t>
             </a:fld>
             <a:endParaRPr lang="en-US"/>
           </a:p>
@@ -457,7 +462,7 @@
           <a:p>
             <a:fld id="{4A227F7C-5135-49D1-B6CF-8F631C0E6D17}" type="datetimeFigureOut">
               <a:rPr lang="en-US" smtClean="0"/>
-              <a:t>5/3/2026</a:t>
+              <a:t>5/4/2026</a:t>
             </a:fld>
             <a:endParaRPr lang="en-US"/>
           </a:p>
@@ -665,7 +670,7 @@
           <a:p>
             <a:fld id="{4A227F7C-5135-49D1-B6CF-8F631C0E6D17}" type="datetimeFigureOut">
               <a:rPr lang="en-US" smtClean="0"/>
-              <a:t>5/3/2026</a:t>
+              <a:t>5/4/2026</a:t>
             </a:fld>
             <a:endParaRPr lang="en-US"/>
           </a:p>
@@ -863,7 +868,7 @@
           <a:p>
             <a:fld id="{4A227F7C-5135-49D1-B6CF-8F631C0E6D17}" type="datetimeFigureOut">
               <a:rPr lang="en-US" smtClean="0"/>
-              <a:t>5/3/2026</a:t>
+              <a:t>5/4/2026</a:t>
             </a:fld>
             <a:endParaRPr lang="en-US"/>
           </a:p>
@@ -1138,7 +1143,7 @@
           <a:p>
             <a:fld id="{4A227F7C-5135-49D1-B6CF-8F631C0E6D17}" type="datetimeFigureOut">
               <a:rPr lang="en-US" smtClean="0"/>
-              <a:t>5/3/2026</a:t>
+              <a:t>5/4/2026</a:t>
             </a:fld>
             <a:endParaRPr lang="en-US"/>
           </a:p>
@@ -1403,7 +1408,7 @@
           <a:p>
             <a:fld id="{4A227F7C-5135-49D1-B6CF-8F631C0E6D17}" type="datetimeFigureOut">
               <a:rPr lang="en-US" smtClean="0"/>
-              <a:t>5/3/2026</a:t>
+              <a:t>5/4/2026</a:t>
             </a:fld>
             <a:endParaRPr lang="en-US"/>
           </a:p>
@@ -1815,7 +1820,7 @@
           <a:p>
             <a:fld id="{4A227F7C-5135-49D1-B6CF-8F631C0E6D17}" type="datetimeFigureOut">
               <a:rPr lang="en-US" smtClean="0"/>
-              <a:t>5/3/2026</a:t>
+              <a:t>5/4/2026</a:t>
             </a:fld>
             <a:endParaRPr lang="en-US"/>
           </a:p>
@@ -1956,7 +1961,7 @@
           <a:p>
             <a:fld id="{4A227F7C-5135-49D1-B6CF-8F631C0E6D17}" type="datetimeFigureOut">
               <a:rPr lang="en-US" smtClean="0"/>
-              <a:t>5/3/2026</a:t>
+              <a:t>5/4/2026</a:t>
             </a:fld>
             <a:endParaRPr lang="en-US"/>
           </a:p>
@@ -2069,7 +2074,7 @@
           <a:p>
             <a:fld id="{4A227F7C-5135-49D1-B6CF-8F631C0E6D17}" type="datetimeFigureOut">
               <a:rPr lang="en-US" smtClean="0"/>
-              <a:t>5/3/2026</a:t>
+              <a:t>5/4/2026</a:t>
             </a:fld>
             <a:endParaRPr lang="en-US"/>
           </a:p>
@@ -2380,7 +2385,7 @@
           <a:p>
             <a:fld id="{4A227F7C-5135-49D1-B6CF-8F631C0E6D17}" type="datetimeFigureOut">
               <a:rPr lang="en-US" smtClean="0"/>
-              <a:t>5/3/2026</a:t>
+              <a:t>5/4/2026</a:t>
             </a:fld>
             <a:endParaRPr lang="en-US"/>
           </a:p>
@@ -2668,7 +2673,7 @@
           <a:p>
             <a:fld id="{4A227F7C-5135-49D1-B6CF-8F631C0E6D17}" type="datetimeFigureOut">
               <a:rPr lang="en-US" smtClean="0"/>
-              <a:t>5/3/2026</a:t>
+              <a:t>5/4/2026</a:t>
             </a:fld>
             <a:endParaRPr lang="en-US"/>
           </a:p>
@@ -2909,7 +2914,7 @@
           <a:p>
             <a:fld id="{4A227F7C-5135-49D1-B6CF-8F631C0E6D17}" type="datetimeFigureOut">
               <a:rPr lang="en-US" smtClean="0"/>
-              <a:t>5/3/2026</a:t>
+              <a:t>5/4/2026</a:t>
             </a:fld>
             <a:endParaRPr lang="en-US"/>
           </a:p>
@@ -6084,8 +6089,8 @@
         </p:blipFill>
         <p:spPr>
           <a:xfrm>
-            <a:off x="6345165" y="2217815"/>
-            <a:ext cx="2848454" cy="3997831"/>
+            <a:off x="6562584" y="1576447"/>
+            <a:ext cx="3755923" cy="5271472"/>
           </a:xfrm>
           <a:prstGeom prst="rect">
             <a:avLst/>
@@ -6717,422 +6722,7 @@
       </p:grpSpPr>
       <p:sp useBgFill="1">
         <p:nvSpPr>
-          <p:cNvPr id="10" name="Rectangle 9">
-            <a:extLst>
-              <a:ext uri="{FF2B5EF4-FFF2-40B4-BE49-F238E27FC236}">
-                <a16:creationId xmlns:a16="http://schemas.microsoft.com/office/drawing/2014/main" id="{A8384FB5-9ADC-4DDC-881B-597D56F5B15D}"/>
-              </a:ext>
-              <a:ext uri="{C183D7F6-B498-43B3-948B-1728B52AA6E4}">
-                <adec:decorative xmlns:adec="http://schemas.microsoft.com/office/drawing/2017/decorative" val="1"/>
-              </a:ext>
-            </a:extLst>
-          </p:cNvPr>
-          <p:cNvSpPr>
-            <a:spLocks noGrp="1" noRot="1" noChangeAspect="1" noMove="1" noResize="1" noEditPoints="1" noAdjustHandles="1" noChangeArrowheads="1" noChangeShapeType="1" noTextEdit="1"/>
-          </p:cNvSpPr>
-          <p:nvPr>
-            <p:extLst>
-              <p:ext uri="{386F3935-93C4-4BCD-93E2-E3B085C9AB24}">
-                <p16:designElem xmlns:p16="http://schemas.microsoft.com/office/powerpoint/2015/main" val="1"/>
-              </p:ext>
-            </p:extLst>
-          </p:nvPr>
-        </p:nvSpPr>
-        <p:spPr>
-          <a:xfrm>
-            <a:off x="0" y="0"/>
-            <a:ext cx="12192000" cy="6858000"/>
-          </a:xfrm>
-          <a:prstGeom prst="rect">
-            <a:avLst/>
-          </a:prstGeom>
-          <a:ln w="12700" cap="flat" cmpd="sng" algn="ctr">
-            <a:noFill/>
-            <a:prstDash val="solid"/>
-            <a:miter lim="800000"/>
-          </a:ln>
-          <a:effectLst/>
-          <a:extLst>
-            <a:ext uri="{91240B29-F687-4F45-9708-019B960494DF}">
-              <a14:hiddenLine xmlns:a14="http://schemas.microsoft.com/office/drawing/2010/main" w="12700" cap="flat" cmpd="sng" algn="ctr">
-                <a:solidFill>
-                  <a:schemeClr val="accent1">
-                    <a:shade val="50000"/>
-                  </a:schemeClr>
-                </a:solidFill>
-                <a:prstDash val="solid"/>
-                <a:miter lim="800000"/>
-              </a14:hiddenLine>
-            </a:ext>
-          </a:extLst>
-        </p:spPr>
-        <p:style>
-          <a:lnRef idx="2">
-            <a:schemeClr val="accent1">
-              <a:shade val="50000"/>
-            </a:schemeClr>
-          </a:lnRef>
-          <a:fillRef idx="1">
-            <a:schemeClr val="accent1"/>
-          </a:fillRef>
-          <a:effectRef idx="0">
-            <a:schemeClr val="accent1"/>
-          </a:effectRef>
-          <a:fontRef idx="minor">
-            <a:schemeClr val="lt1"/>
-          </a:fontRef>
-        </p:style>
-        <p:txBody>
-          <a:bodyPr rtlCol="0" anchor="ctr"/>
-          <a:lstStyle/>
-          <a:p>
-            <a:pPr algn="ctr"/>
-            <a:endParaRPr lang="en-US"/>
-          </a:p>
-        </p:txBody>
-      </p:sp>
-      <p:sp>
-        <p:nvSpPr>
-          <p:cNvPr id="12" name="Rectangle 11">
-            <a:extLst>
-              <a:ext uri="{FF2B5EF4-FFF2-40B4-BE49-F238E27FC236}">
-                <a16:creationId xmlns:a16="http://schemas.microsoft.com/office/drawing/2014/main" id="{1199E1B1-A8C0-4FE8-A5A8-1CB41D69F857}"/>
-              </a:ext>
-              <a:ext uri="{C183D7F6-B498-43B3-948B-1728B52AA6E4}">
-                <adec:decorative xmlns:adec="http://schemas.microsoft.com/office/drawing/2017/decorative" val="1"/>
-              </a:ext>
-            </a:extLst>
-          </p:cNvPr>
-          <p:cNvSpPr>
-            <a:spLocks noGrp="1" noRot="1" noChangeAspect="1" noMove="1" noResize="1" noEditPoints="1" noAdjustHandles="1" noChangeArrowheads="1" noChangeShapeType="1" noTextEdit="1"/>
-          </p:cNvSpPr>
-          <p:nvPr>
-            <p:extLst>
-              <p:ext uri="{386F3935-93C4-4BCD-93E2-E3B085C9AB24}">
-                <p16:designElem xmlns:p16="http://schemas.microsoft.com/office/powerpoint/2015/main" val="1"/>
-              </p:ext>
-            </p:extLst>
-          </p:nvPr>
-        </p:nvSpPr>
-        <p:spPr>
-          <a:xfrm rot="10800000" flipH="1">
-            <a:off x="2" y="0"/>
-            <a:ext cx="12191998" cy="1575955"/>
-          </a:xfrm>
-          <a:prstGeom prst="rect">
-            <a:avLst/>
-          </a:prstGeom>
-          <a:gradFill>
-            <a:gsLst>
-              <a:gs pos="0">
-                <a:srgbClr val="000000">
-                  <a:alpha val="96000"/>
-                </a:srgbClr>
-              </a:gs>
-              <a:gs pos="100000">
-                <a:schemeClr val="accent1">
-                  <a:lumMod val="75000"/>
-                </a:schemeClr>
-              </a:gs>
-            </a:gsLst>
-            <a:lin ang="6000000" scaled="0"/>
-          </a:gradFill>
-          <a:ln>
-            <a:noFill/>
-          </a:ln>
-        </p:spPr>
-        <p:style>
-          <a:lnRef idx="2">
-            <a:schemeClr val="accent1">
-              <a:shade val="50000"/>
-            </a:schemeClr>
-          </a:lnRef>
-          <a:fillRef idx="1">
-            <a:schemeClr val="accent1"/>
-          </a:fillRef>
-          <a:effectRef idx="0">
-            <a:schemeClr val="accent1"/>
-          </a:effectRef>
-          <a:fontRef idx="minor">
-            <a:schemeClr val="lt1"/>
-          </a:fontRef>
-        </p:style>
-        <p:txBody>
-          <a:bodyPr rtlCol="0" anchor="ctr"/>
-          <a:lstStyle/>
-          <a:p>
-            <a:pPr algn="ctr"/>
-            <a:endParaRPr lang="en-US"/>
-          </a:p>
-        </p:txBody>
-      </p:sp>
-      <p:sp>
-        <p:nvSpPr>
-          <p:cNvPr id="14" name="Rectangle 13">
-            <a:extLst>
-              <a:ext uri="{FF2B5EF4-FFF2-40B4-BE49-F238E27FC236}">
-                <a16:creationId xmlns:a16="http://schemas.microsoft.com/office/drawing/2014/main" id="{84A8DE83-DE75-4B41-9DB4-A7EC0B0DEC0B}"/>
-              </a:ext>
-              <a:ext uri="{C183D7F6-B498-43B3-948B-1728B52AA6E4}">
-                <adec:decorative xmlns:adec="http://schemas.microsoft.com/office/drawing/2017/decorative" val="1"/>
-              </a:ext>
-            </a:extLst>
-          </p:cNvPr>
-          <p:cNvSpPr>
-            <a:spLocks noGrp="1" noRot="1" noChangeAspect="1" noMove="1" noResize="1" noEditPoints="1" noAdjustHandles="1" noChangeArrowheads="1" noChangeShapeType="1" noTextEdit="1"/>
-          </p:cNvSpPr>
-          <p:nvPr>
-            <p:extLst>
-              <p:ext uri="{386F3935-93C4-4BCD-93E2-E3B085C9AB24}">
-                <p16:designElem xmlns:p16="http://schemas.microsoft.com/office/powerpoint/2015/main" val="1"/>
-              </p:ext>
-            </p:extLst>
-          </p:nvPr>
-        </p:nvSpPr>
-        <p:spPr>
-          <a:xfrm>
-            <a:off x="0" y="0"/>
-            <a:ext cx="8128856" cy="1575461"/>
-          </a:xfrm>
-          <a:prstGeom prst="rect">
-            <a:avLst/>
-          </a:prstGeom>
-          <a:gradFill>
-            <a:gsLst>
-              <a:gs pos="0">
-                <a:schemeClr val="accent1">
-                  <a:alpha val="41000"/>
-                </a:schemeClr>
-              </a:gs>
-              <a:gs pos="74000">
-                <a:schemeClr val="accent1">
-                  <a:lumMod val="60000"/>
-                  <a:lumOff val="40000"/>
-                  <a:alpha val="0"/>
-                </a:schemeClr>
-              </a:gs>
-            </a:gsLst>
-            <a:lin ang="8400000" scaled="0"/>
-          </a:gradFill>
-          <a:ln>
-            <a:noFill/>
-          </a:ln>
-        </p:spPr>
-        <p:style>
-          <a:lnRef idx="2">
-            <a:schemeClr val="accent1">
-              <a:shade val="50000"/>
-            </a:schemeClr>
-          </a:lnRef>
-          <a:fillRef idx="1">
-            <a:schemeClr val="accent1"/>
-          </a:fillRef>
-          <a:effectRef idx="0">
-            <a:schemeClr val="accent1"/>
-          </a:effectRef>
-          <a:fontRef idx="minor">
-            <a:schemeClr val="lt1"/>
-          </a:fontRef>
-        </p:style>
-        <p:txBody>
-          <a:bodyPr rtlCol="0" anchor="ctr"/>
-          <a:lstStyle/>
-          <a:p>
-            <a:pPr algn="ctr"/>
-            <a:endParaRPr lang="en-US"/>
-          </a:p>
-        </p:txBody>
-      </p:sp>
-      <p:sp>
-        <p:nvSpPr>
-          <p:cNvPr id="16" name="Rectangle 15">
-            <a:extLst>
-              <a:ext uri="{FF2B5EF4-FFF2-40B4-BE49-F238E27FC236}">
-                <a16:creationId xmlns:a16="http://schemas.microsoft.com/office/drawing/2014/main" id="{A7009A0A-BEF5-4EAC-AF15-E4F9F002E239}"/>
-              </a:ext>
-              <a:ext uri="{C183D7F6-B498-43B3-948B-1728B52AA6E4}">
-                <adec:decorative xmlns:adec="http://schemas.microsoft.com/office/drawing/2017/decorative" val="1"/>
-              </a:ext>
-            </a:extLst>
-          </p:cNvPr>
-          <p:cNvSpPr>
-            <a:spLocks noGrp="1" noRot="1" noChangeAspect="1" noMove="1" noResize="1" noEditPoints="1" noAdjustHandles="1" noChangeArrowheads="1" noChangeShapeType="1" noTextEdit="1"/>
-          </p:cNvSpPr>
-          <p:nvPr>
-            <p:extLst>
-              <p:ext uri="{386F3935-93C4-4BCD-93E2-E3B085C9AB24}">
-                <p16:designElem xmlns:p16="http://schemas.microsoft.com/office/powerpoint/2015/main" val="1"/>
-              </p:ext>
-            </p:extLst>
-          </p:nvPr>
-        </p:nvSpPr>
-        <p:spPr>
-          <a:xfrm flipH="1">
-            <a:off x="-3" y="-1"/>
-            <a:ext cx="12192002" cy="1574311"/>
-          </a:xfrm>
-          <a:prstGeom prst="rect">
-            <a:avLst/>
-          </a:prstGeom>
-          <a:gradFill>
-            <a:gsLst>
-              <a:gs pos="0">
-                <a:srgbClr val="000000">
-                  <a:alpha val="63000"/>
-                </a:srgbClr>
-              </a:gs>
-              <a:gs pos="78000">
-                <a:schemeClr val="accent1">
-                  <a:alpha val="15000"/>
-                </a:schemeClr>
-              </a:gs>
-            </a:gsLst>
-            <a:lin ang="15600000" scaled="0"/>
-          </a:gradFill>
-          <a:ln>
-            <a:noFill/>
-          </a:ln>
-        </p:spPr>
-        <p:style>
-          <a:lnRef idx="2">
-            <a:schemeClr val="accent1">
-              <a:shade val="50000"/>
-            </a:schemeClr>
-          </a:lnRef>
-          <a:fillRef idx="1">
-            <a:schemeClr val="accent1"/>
-          </a:fillRef>
-          <a:effectRef idx="0">
-            <a:schemeClr val="accent1"/>
-          </a:effectRef>
-          <a:fontRef idx="minor">
-            <a:schemeClr val="lt1"/>
-          </a:fontRef>
-        </p:style>
-        <p:txBody>
-          <a:bodyPr rtlCol="0" anchor="ctr"/>
-          <a:lstStyle/>
-          <a:p>
-            <a:pPr algn="ctr"/>
-            <a:endParaRPr lang="en-US"/>
-          </a:p>
-        </p:txBody>
-      </p:sp>
-      <p:sp>
-        <p:nvSpPr>
-          <p:cNvPr id="2" name="Title 1">
-            <a:extLst>
-              <a:ext uri="{FF2B5EF4-FFF2-40B4-BE49-F238E27FC236}">
-                <a16:creationId xmlns:a16="http://schemas.microsoft.com/office/drawing/2014/main" id="{8E0B3BEC-9C7D-C7A9-CF4A-9742B541E8B7}"/>
-              </a:ext>
-            </a:extLst>
-          </p:cNvPr>
-          <p:cNvSpPr>
-            <a:spLocks noGrp="1"/>
-          </p:cNvSpPr>
-          <p:nvPr>
-            <p:ph type="title"/>
-          </p:nvPr>
-        </p:nvSpPr>
-        <p:spPr>
-          <a:xfrm>
-            <a:off x="699713" y="248038"/>
-            <a:ext cx="7063721" cy="1159200"/>
-          </a:xfrm>
-        </p:spPr>
-        <p:txBody>
-          <a:bodyPr vert="horz" lIns="91440" tIns="45720" rIns="91440" bIns="45720" rtlCol="0" anchor="ctr">
-            <a:normAutofit/>
-          </a:bodyPr>
-          <a:lstStyle/>
-          <a:p>
-            <a:r>
-              <a:rPr lang="en-US" sz="4000" kern="1200">
-                <a:solidFill>
-                  <a:srgbClr val="FFFFFF"/>
-                </a:solidFill>
-                <a:latin typeface="+mj-lt"/>
-                <a:ea typeface="+mj-ea"/>
-                <a:cs typeface="+mj-cs"/>
-              </a:rPr>
-              <a:t>Fruit Object Code</a:t>
-            </a:r>
-          </a:p>
-        </p:txBody>
-      </p:sp>
-      <p:pic>
-        <p:nvPicPr>
-          <p:cNvPr id="5" name="Content Placeholder 4">
-            <a:extLst>
-              <a:ext uri="{FF2B5EF4-FFF2-40B4-BE49-F238E27FC236}">
-                <a16:creationId xmlns:a16="http://schemas.microsoft.com/office/drawing/2014/main" id="{7FC2D68A-7BBB-755C-3077-9F3992938C3E}"/>
-              </a:ext>
-            </a:extLst>
-          </p:cNvPr>
-          <p:cNvPicPr>
-            <a:picLocks noGrp="1" noChangeAspect="1"/>
-          </p:cNvPicPr>
-          <p:nvPr>
-            <p:ph idx="1"/>
-          </p:nvPr>
-        </p:nvPicPr>
-        <p:blipFill>
-          <a:blip r:embed="rId2"/>
-          <a:stretch>
-            <a:fillRect/>
-          </a:stretch>
-        </p:blipFill>
-        <p:spPr>
-          <a:xfrm>
-            <a:off x="1190305" y="1655275"/>
-            <a:ext cx="9870044" cy="4885671"/>
-          </a:xfrm>
-          <a:prstGeom prst="rect">
-            <a:avLst/>
-          </a:prstGeom>
-        </p:spPr>
-      </p:pic>
-    </p:spTree>
-    <p:extLst>
-      <p:ext uri="{BB962C8B-B14F-4D97-AF65-F5344CB8AC3E}">
-        <p14:creationId xmlns:p14="http://schemas.microsoft.com/office/powerpoint/2010/main" val="2814347685"/>
-      </p:ext>
-    </p:extLst>
-  </p:cSld>
-  <p:clrMapOvr>
-    <a:masterClrMapping/>
-  </p:clrMapOvr>
-</p:sld>
-</file>
-
-<file path=ppt/slides/slide6.xml><?xml version="1.0" encoding="utf-8"?>
-<p:sld xmlns:a="http://schemas.openxmlformats.org/drawingml/2006/main" xmlns:r="http://schemas.openxmlformats.org/officeDocument/2006/relationships" xmlns:p="http://schemas.openxmlformats.org/presentationml/2006/main">
-  <p:cSld>
-    <p:bg>
-      <p:bgPr>
-        <a:solidFill>
-          <a:schemeClr val="bg1"/>
-        </a:solidFill>
-        <a:effectLst/>
-      </p:bgPr>
-    </p:bg>
-    <p:spTree>
-      <p:nvGrpSpPr>
-        <p:cNvPr id="1" name=""/>
-        <p:cNvGrpSpPr/>
-        <p:nvPr/>
-      </p:nvGrpSpPr>
-      <p:grpSpPr>
-        <a:xfrm>
-          <a:off x="0" y="0"/>
-          <a:ext cx="0" cy="0"/>
-          <a:chOff x="0" y="0"/>
-          <a:chExt cx="0" cy="0"/>
-        </a:xfrm>
-      </p:grpSpPr>
-      <p:sp useBgFill="1">
-        <p:nvSpPr>
-          <p:cNvPr id="10" name="Rectangle 9">
+          <p:cNvPr id="42" name="Rectangle 41">
             <a:extLst>
               <a:ext uri="{FF2B5EF4-FFF2-40B4-BE49-F238E27FC236}">
                 <a16:creationId xmlns:a16="http://schemas.microsoft.com/office/drawing/2014/main" id="{9203DE33-2CD4-4CA8-9AF3-37C3B65133B0}"/>
@@ -7192,7 +6782,7 @@
       </p:sp>
       <p:sp>
         <p:nvSpPr>
-          <p:cNvPr id="12" name="Rectangle 11">
+          <p:cNvPr id="43" name="Rectangle 42">
             <a:extLst>
               <a:ext uri="{FF2B5EF4-FFF2-40B4-BE49-F238E27FC236}">
                 <a16:creationId xmlns:a16="http://schemas.microsoft.com/office/drawing/2014/main" id="{0AF57B88-1D4C-41FA-A761-EC1DD10C35CB}"/>
@@ -7265,7 +6855,7 @@
       </p:sp>
       <p:sp>
         <p:nvSpPr>
-          <p:cNvPr id="14" name="Rectangle 13">
+          <p:cNvPr id="44" name="Rectangle 43">
             <a:extLst>
               <a:ext uri="{FF2B5EF4-FFF2-40B4-BE49-F238E27FC236}">
                 <a16:creationId xmlns:a16="http://schemas.microsoft.com/office/drawing/2014/main" id="{D2548F45-5164-4ABB-8212-7F293FDED8D4}"/>
@@ -7341,10 +6931,10 @@
       </p:sp>
       <p:pic>
         <p:nvPicPr>
-          <p:cNvPr id="5" name="Content Placeholder 4">
-            <a:extLst>
-              <a:ext uri="{FF2B5EF4-FFF2-40B4-BE49-F238E27FC236}">
-                <a16:creationId xmlns:a16="http://schemas.microsoft.com/office/drawing/2014/main" id="{57C2778D-B799-E3AB-27F6-D0CB3F4188AE}"/>
+          <p:cNvPr id="9" name="Content Placeholder 8">
+            <a:extLst>
+              <a:ext uri="{FF2B5EF4-FFF2-40B4-BE49-F238E27FC236}">
+                <a16:creationId xmlns:a16="http://schemas.microsoft.com/office/drawing/2014/main" id="{376FF8CD-F849-729F-5D1C-94538062A7C7}"/>
               </a:ext>
             </a:extLst>
           </p:cNvPr>
@@ -7357,7 +6947,7 @@
         </p:nvPicPr>
         <p:blipFill>
           <a:blip r:embed="rId2"/>
-          <a:srcRect r="19002"/>
+          <a:srcRect r="20486"/>
           <a:stretch>
             <a:fillRect/>
           </a:stretch>
@@ -7374,7 +6964,500 @@
       </p:pic>
       <p:sp>
         <p:nvSpPr>
-          <p:cNvPr id="16" name="Freeform: Shape 15">
+          <p:cNvPr id="45" name="Freeform: Shape 44">
+            <a:extLst>
+              <a:ext uri="{FF2B5EF4-FFF2-40B4-BE49-F238E27FC236}">
+                <a16:creationId xmlns:a16="http://schemas.microsoft.com/office/drawing/2014/main" id="{5E81CCFB-7BEF-4186-86FB-D09450B4D02D}"/>
+              </a:ext>
+              <a:ext uri="{C183D7F6-B498-43B3-948B-1728B52AA6E4}">
+                <adec:decorative xmlns:adec="http://schemas.microsoft.com/office/drawing/2017/decorative" val="1"/>
+              </a:ext>
+            </a:extLst>
+          </p:cNvPr>
+          <p:cNvSpPr>
+            <a:spLocks noGrp="1" noRot="1" noChangeAspect="1" noMove="1" noResize="1" noEditPoints="1" noAdjustHandles="1" noChangeArrowheads="1" noChangeShapeType="1" noTextEdit="1"/>
+          </p:cNvSpPr>
+          <p:nvPr>
+            <p:extLst>
+              <p:ext uri="{386F3935-93C4-4BCD-93E2-E3B085C9AB24}">
+                <p16:designElem xmlns:p16="http://schemas.microsoft.com/office/powerpoint/2015/main" val="1"/>
+              </p:ext>
+            </p:extLst>
+          </p:nvPr>
+        </p:nvSpPr>
+        <p:spPr>
+          <a:xfrm rot="6097846">
+            <a:off x="-747355" y="1201312"/>
+            <a:ext cx="4808302" cy="4088666"/>
+          </a:xfrm>
+          <a:custGeom>
+            <a:avLst/>
+            <a:gdLst>
+              <a:gd name="connsiteX0" fmla="*/ 48844 w 4808302"/>
+              <a:gd name="connsiteY0" fmla="*/ 2888671 h 4088666"/>
+              <a:gd name="connsiteX1" fmla="*/ 0 w 4808302"/>
+              <a:gd name="connsiteY1" fmla="*/ 2404151 h 4088666"/>
+              <a:gd name="connsiteX2" fmla="*/ 2404151 w 4808302"/>
+              <a:gd name="connsiteY2" fmla="*/ 0 h 4088666"/>
+              <a:gd name="connsiteX3" fmla="*/ 4808302 w 4808302"/>
+              <a:gd name="connsiteY3" fmla="*/ 2404151 h 4088666"/>
+              <a:gd name="connsiteX4" fmla="*/ 4700216 w 4808302"/>
+              <a:gd name="connsiteY4" fmla="*/ 3119072 h 4088666"/>
+              <a:gd name="connsiteX5" fmla="*/ 4643143 w 4808302"/>
+              <a:gd name="connsiteY5" fmla="*/ 3275009 h 4088666"/>
+              <a:gd name="connsiteX6" fmla="*/ 690093 w 4808302"/>
+              <a:gd name="connsiteY6" fmla="*/ 4088666 h 4088666"/>
+              <a:gd name="connsiteX7" fmla="*/ 548991 w 4808302"/>
+              <a:gd name="connsiteY7" fmla="*/ 3933414 h 4088666"/>
+              <a:gd name="connsiteX8" fmla="*/ 48844 w 4808302"/>
+              <a:gd name="connsiteY8" fmla="*/ 2888671 h 4088666"/>
+            </a:gdLst>
+            <a:ahLst/>
+            <a:cxnLst>
+              <a:cxn ang="0">
+                <a:pos x="connsiteX0" y="connsiteY0"/>
+              </a:cxn>
+              <a:cxn ang="0">
+                <a:pos x="connsiteX1" y="connsiteY1"/>
+              </a:cxn>
+              <a:cxn ang="0">
+                <a:pos x="connsiteX2" y="connsiteY2"/>
+              </a:cxn>
+              <a:cxn ang="0">
+                <a:pos x="connsiteX3" y="connsiteY3"/>
+              </a:cxn>
+              <a:cxn ang="0">
+                <a:pos x="connsiteX4" y="connsiteY4"/>
+              </a:cxn>
+              <a:cxn ang="0">
+                <a:pos x="connsiteX5" y="connsiteY5"/>
+              </a:cxn>
+              <a:cxn ang="0">
+                <a:pos x="connsiteX6" y="connsiteY6"/>
+              </a:cxn>
+              <a:cxn ang="0">
+                <a:pos x="connsiteX7" y="connsiteY7"/>
+              </a:cxn>
+              <a:cxn ang="0">
+                <a:pos x="connsiteX8" y="connsiteY8"/>
+              </a:cxn>
+            </a:cxnLst>
+            <a:rect l="l" t="t" r="r" b="b"/>
+            <a:pathLst>
+              <a:path w="4808302" h="4088666">
+                <a:moveTo>
+                  <a:pt x="48844" y="2888671"/>
+                </a:moveTo>
+                <a:cubicBezTo>
+                  <a:pt x="16818" y="2732167"/>
+                  <a:pt x="0" y="2570123"/>
+                  <a:pt x="0" y="2404151"/>
+                </a:cubicBezTo>
+                <a:cubicBezTo>
+                  <a:pt x="0" y="1076375"/>
+                  <a:pt x="1076375" y="0"/>
+                  <a:pt x="2404151" y="0"/>
+                </a:cubicBezTo>
+                <a:cubicBezTo>
+                  <a:pt x="3731927" y="0"/>
+                  <a:pt x="4808302" y="1076375"/>
+                  <a:pt x="4808302" y="2404151"/>
+                </a:cubicBezTo>
+                <a:cubicBezTo>
+                  <a:pt x="4808302" y="2653109"/>
+                  <a:pt x="4770461" y="2893229"/>
+                  <a:pt x="4700216" y="3119072"/>
+                </a:cubicBezTo>
+                <a:lnTo>
+                  <a:pt x="4643143" y="3275009"/>
+                </a:lnTo>
+                <a:lnTo>
+                  <a:pt x="690093" y="4088666"/>
+                </a:lnTo>
+                <a:lnTo>
+                  <a:pt x="548991" y="3933414"/>
+                </a:lnTo>
+                <a:cubicBezTo>
+                  <a:pt x="304015" y="3636572"/>
+                  <a:pt x="128908" y="3279932"/>
+                  <a:pt x="48844" y="2888671"/>
+                </a:cubicBezTo>
+                <a:close/>
+              </a:path>
+            </a:pathLst>
+          </a:custGeom>
+          <a:gradFill>
+            <a:gsLst>
+              <a:gs pos="39000">
+                <a:schemeClr val="accent1">
+                  <a:lumMod val="60000"/>
+                  <a:lumOff val="40000"/>
+                  <a:alpha val="0"/>
+                </a:schemeClr>
+              </a:gs>
+              <a:gs pos="100000">
+                <a:schemeClr val="accent1">
+                  <a:lumMod val="75000"/>
+                  <a:alpha val="26000"/>
+                </a:schemeClr>
+              </a:gs>
+            </a:gsLst>
+            <a:lin ang="16800000" scaled="0"/>
+          </a:gradFill>
+          <a:ln>
+            <a:noFill/>
+          </a:ln>
+        </p:spPr>
+        <p:style>
+          <a:lnRef idx="2">
+            <a:schemeClr val="accent1">
+              <a:shade val="50000"/>
+            </a:schemeClr>
+          </a:lnRef>
+          <a:fillRef idx="1">
+            <a:schemeClr val="accent1"/>
+          </a:fillRef>
+          <a:effectRef idx="0">
+            <a:schemeClr val="accent1"/>
+          </a:effectRef>
+          <a:fontRef idx="minor">
+            <a:schemeClr val="lt1"/>
+          </a:fontRef>
+        </p:style>
+        <p:txBody>
+          <a:bodyPr wrap="square" rtlCol="0" anchor="ctr">
+            <a:noAutofit/>
+          </a:bodyPr>
+          <a:lstStyle/>
+          <a:p>
+            <a:pPr algn="ctr"/>
+            <a:endParaRPr lang="en-US" dirty="0"/>
+          </a:p>
+        </p:txBody>
+      </p:sp>
+      <p:sp>
+        <p:nvSpPr>
+          <p:cNvPr id="2" name="Title 1">
+            <a:extLst>
+              <a:ext uri="{FF2B5EF4-FFF2-40B4-BE49-F238E27FC236}">
+                <a16:creationId xmlns:a16="http://schemas.microsoft.com/office/drawing/2014/main" id="{8E0B3BEC-9C7D-C7A9-CF4A-9742B541E8B7}"/>
+              </a:ext>
+            </a:extLst>
+          </p:cNvPr>
+          <p:cNvSpPr>
+            <a:spLocks noGrp="1"/>
+          </p:cNvSpPr>
+          <p:nvPr>
+            <p:ph type="title"/>
+          </p:nvPr>
+        </p:nvSpPr>
+        <p:spPr>
+          <a:xfrm>
+            <a:off x="534473" y="2950387"/>
+            <a:ext cx="3052293" cy="3531403"/>
+          </a:xfrm>
+        </p:spPr>
+        <p:txBody>
+          <a:bodyPr vert="horz" lIns="91440" tIns="45720" rIns="91440" bIns="45720" rtlCol="0" anchor="t">
+            <a:normAutofit/>
+          </a:bodyPr>
+          <a:lstStyle/>
+          <a:p>
+            <a:pPr algn="r"/>
+            <a:r>
+              <a:rPr lang="en-US" sz="4000">
+                <a:solidFill>
+                  <a:srgbClr val="FFFFFF"/>
+                </a:solidFill>
+              </a:rPr>
+              <a:t>Fruit Object Code</a:t>
+            </a:r>
+          </a:p>
+        </p:txBody>
+      </p:sp>
+    </p:spTree>
+    <p:extLst>
+      <p:ext uri="{BB962C8B-B14F-4D97-AF65-F5344CB8AC3E}">
+        <p14:creationId xmlns:p14="http://schemas.microsoft.com/office/powerpoint/2010/main" val="2814347685"/>
+      </p:ext>
+    </p:extLst>
+  </p:cSld>
+  <p:clrMapOvr>
+    <a:masterClrMapping/>
+  </p:clrMapOvr>
+</p:sld>
+</file>
+
+<file path=ppt/slides/slide6.xml><?xml version="1.0" encoding="utf-8"?>
+<p:sld xmlns:a="http://schemas.openxmlformats.org/drawingml/2006/main" xmlns:r="http://schemas.openxmlformats.org/officeDocument/2006/relationships" xmlns:p="http://schemas.openxmlformats.org/presentationml/2006/main">
+  <p:cSld>
+    <p:bg>
+      <p:bgPr>
+        <a:solidFill>
+          <a:schemeClr val="bg1"/>
+        </a:solidFill>
+        <a:effectLst/>
+      </p:bgPr>
+    </p:bg>
+    <p:spTree>
+      <p:nvGrpSpPr>
+        <p:cNvPr id="1" name=""/>
+        <p:cNvGrpSpPr/>
+        <p:nvPr/>
+      </p:nvGrpSpPr>
+      <p:grpSpPr>
+        <a:xfrm>
+          <a:off x="0" y="0"/>
+          <a:ext cx="0" cy="0"/>
+          <a:chOff x="0" y="0"/>
+          <a:chExt cx="0" cy="0"/>
+        </a:xfrm>
+      </p:grpSpPr>
+      <p:sp useBgFill="1">
+        <p:nvSpPr>
+          <p:cNvPr id="21" name="Rectangle 20">
+            <a:extLst>
+              <a:ext uri="{FF2B5EF4-FFF2-40B4-BE49-F238E27FC236}">
+                <a16:creationId xmlns:a16="http://schemas.microsoft.com/office/drawing/2014/main" id="{9203DE33-2CD4-4CA8-9AF3-37C3B65133B0}"/>
+              </a:ext>
+              <a:ext uri="{C183D7F6-B498-43B3-948B-1728B52AA6E4}">
+                <adec:decorative xmlns:adec="http://schemas.microsoft.com/office/drawing/2017/decorative" val="1"/>
+              </a:ext>
+            </a:extLst>
+          </p:cNvPr>
+          <p:cNvSpPr>
+            <a:spLocks noGrp="1" noRot="1" noChangeAspect="1" noMove="1" noResize="1" noEditPoints="1" noAdjustHandles="1" noChangeArrowheads="1" noChangeShapeType="1" noTextEdit="1"/>
+          </p:cNvSpPr>
+          <p:nvPr>
+            <p:extLst>
+              <p:ext uri="{386F3935-93C4-4BCD-93E2-E3B085C9AB24}">
+                <p16:designElem xmlns:p16="http://schemas.microsoft.com/office/powerpoint/2015/main" val="1"/>
+              </p:ext>
+            </p:extLst>
+          </p:nvPr>
+        </p:nvSpPr>
+        <p:spPr>
+          <a:xfrm>
+            <a:off x="0" y="2"/>
+            <a:ext cx="12192000" cy="6857997"/>
+          </a:xfrm>
+          <a:prstGeom prst="rect">
+            <a:avLst/>
+          </a:prstGeom>
+          <a:ln>
+            <a:noFill/>
+          </a:ln>
+        </p:spPr>
+        <p:style>
+          <a:lnRef idx="2">
+            <a:schemeClr val="accent1">
+              <a:shade val="50000"/>
+            </a:schemeClr>
+          </a:lnRef>
+          <a:fillRef idx="1">
+            <a:schemeClr val="accent1"/>
+          </a:fillRef>
+          <a:effectRef idx="0">
+            <a:schemeClr val="accent1"/>
+          </a:effectRef>
+          <a:fontRef idx="minor">
+            <a:schemeClr val="lt1"/>
+          </a:fontRef>
+        </p:style>
+        <p:txBody>
+          <a:bodyPr rtlCol="0" anchor="ctr"/>
+          <a:lstStyle/>
+          <a:p>
+            <a:pPr algn="ctr"/>
+            <a:endParaRPr lang="en-US"/>
+          </a:p>
+        </p:txBody>
+      </p:sp>
+      <p:sp>
+        <p:nvSpPr>
+          <p:cNvPr id="23" name="Rectangle 22">
+            <a:extLst>
+              <a:ext uri="{FF2B5EF4-FFF2-40B4-BE49-F238E27FC236}">
+                <a16:creationId xmlns:a16="http://schemas.microsoft.com/office/drawing/2014/main" id="{0AF57B88-1D4C-41FA-A761-EC1DD10C35CB}"/>
+              </a:ext>
+              <a:ext uri="{C183D7F6-B498-43B3-948B-1728B52AA6E4}">
+                <adec:decorative xmlns:adec="http://schemas.microsoft.com/office/drawing/2017/decorative" val="1"/>
+              </a:ext>
+            </a:extLst>
+          </p:cNvPr>
+          <p:cNvSpPr>
+            <a:spLocks noGrp="1" noRot="1" noChangeAspect="1" noMove="1" noResize="1" noEditPoints="1" noAdjustHandles="1" noChangeArrowheads="1" noChangeShapeType="1" noTextEdit="1"/>
+          </p:cNvSpPr>
+          <p:nvPr>
+            <p:extLst>
+              <p:ext uri="{386F3935-93C4-4BCD-93E2-E3B085C9AB24}">
+                <p16:designElem xmlns:p16="http://schemas.microsoft.com/office/powerpoint/2015/main" val="1"/>
+              </p:ext>
+            </p:extLst>
+          </p:nvPr>
+        </p:nvSpPr>
+        <p:spPr>
+          <a:xfrm rot="5400000" flipH="1">
+            <a:off x="-1417539" y="1417538"/>
+            <a:ext cx="6875818" cy="4040744"/>
+          </a:xfrm>
+          <a:prstGeom prst="rect">
+            <a:avLst/>
+          </a:prstGeom>
+          <a:gradFill>
+            <a:gsLst>
+              <a:gs pos="11000">
+                <a:srgbClr val="000000"/>
+              </a:gs>
+              <a:gs pos="100000">
+                <a:schemeClr val="accent1">
+                  <a:lumMod val="75000"/>
+                </a:schemeClr>
+              </a:gs>
+            </a:gsLst>
+            <a:lin ang="18600000" scaled="0"/>
+          </a:gradFill>
+          <a:ln>
+            <a:noFill/>
+          </a:ln>
+        </p:spPr>
+        <p:style>
+          <a:lnRef idx="2">
+            <a:schemeClr val="accent1">
+              <a:shade val="50000"/>
+            </a:schemeClr>
+          </a:lnRef>
+          <a:fillRef idx="1">
+            <a:schemeClr val="accent1"/>
+          </a:fillRef>
+          <a:effectRef idx="0">
+            <a:schemeClr val="accent1"/>
+          </a:effectRef>
+          <a:fontRef idx="minor">
+            <a:schemeClr val="lt1"/>
+          </a:fontRef>
+        </p:style>
+        <p:txBody>
+          <a:bodyPr rtlCol="0" anchor="ctr"/>
+          <a:lstStyle/>
+          <a:p>
+            <a:pPr algn="ctr"/>
+            <a:endParaRPr lang="en-US" dirty="0"/>
+          </a:p>
+        </p:txBody>
+      </p:sp>
+      <p:sp>
+        <p:nvSpPr>
+          <p:cNvPr id="25" name="Rectangle 24">
+            <a:extLst>
+              <a:ext uri="{FF2B5EF4-FFF2-40B4-BE49-F238E27FC236}">
+                <a16:creationId xmlns:a16="http://schemas.microsoft.com/office/drawing/2014/main" id="{D2548F45-5164-4ABB-8212-7F293FDED8D4}"/>
+              </a:ext>
+              <a:ext uri="{C183D7F6-B498-43B3-948B-1728B52AA6E4}">
+                <adec:decorative xmlns:adec="http://schemas.microsoft.com/office/drawing/2017/decorative" val="1"/>
+              </a:ext>
+            </a:extLst>
+          </p:cNvPr>
+          <p:cNvSpPr>
+            <a:spLocks noGrp="1" noRot="1" noChangeAspect="1" noMove="1" noResize="1" noEditPoints="1" noAdjustHandles="1" noChangeArrowheads="1" noChangeShapeType="1" noTextEdit="1"/>
+          </p:cNvSpPr>
+          <p:nvPr>
+            <p:extLst>
+              <p:ext uri="{386F3935-93C4-4BCD-93E2-E3B085C9AB24}">
+                <p16:designElem xmlns:p16="http://schemas.microsoft.com/office/powerpoint/2015/main" val="1"/>
+              </p:ext>
+            </p:extLst>
+          </p:nvPr>
+        </p:nvSpPr>
+        <p:spPr>
+          <a:xfrm rot="16200000">
+            <a:off x="-159565" y="2659404"/>
+            <a:ext cx="4355594" cy="4040742"/>
+          </a:xfrm>
+          <a:prstGeom prst="rect">
+            <a:avLst/>
+          </a:prstGeom>
+          <a:gradFill>
+            <a:gsLst>
+              <a:gs pos="0">
+                <a:schemeClr val="accent1">
+                  <a:alpha val="50000"/>
+                </a:schemeClr>
+              </a:gs>
+              <a:gs pos="100000">
+                <a:schemeClr val="accent1">
+                  <a:lumMod val="50000"/>
+                  <a:alpha val="0"/>
+                </a:schemeClr>
+              </a:gs>
+            </a:gsLst>
+            <a:lin ang="11400000" scaled="0"/>
+          </a:gradFill>
+          <a:ln>
+            <a:noFill/>
+          </a:ln>
+        </p:spPr>
+        <p:style>
+          <a:lnRef idx="2">
+            <a:schemeClr val="accent1">
+              <a:shade val="50000"/>
+            </a:schemeClr>
+          </a:lnRef>
+          <a:fillRef idx="1">
+            <a:schemeClr val="accent1"/>
+          </a:fillRef>
+          <a:effectRef idx="0">
+            <a:schemeClr val="accent1"/>
+          </a:effectRef>
+          <a:fontRef idx="minor">
+            <a:schemeClr val="lt1"/>
+          </a:fontRef>
+        </p:style>
+        <p:txBody>
+          <a:bodyPr rtlCol="0" anchor="ctr"/>
+          <a:lstStyle/>
+          <a:p>
+            <a:pPr algn="ctr"/>
+            <a:endParaRPr lang="en-US"/>
+          </a:p>
+        </p:txBody>
+      </p:sp>
+      <p:pic>
+        <p:nvPicPr>
+          <p:cNvPr id="9" name="Content Placeholder 8">
+            <a:extLst>
+              <a:ext uri="{FF2B5EF4-FFF2-40B4-BE49-F238E27FC236}">
+                <a16:creationId xmlns:a16="http://schemas.microsoft.com/office/drawing/2014/main" id="{779FF403-B31D-BCA4-DA73-B4EDF8861EAD}"/>
+              </a:ext>
+            </a:extLst>
+          </p:cNvPr>
+          <p:cNvPicPr>
+            <a:picLocks noGrp="1" noChangeAspect="1"/>
+          </p:cNvPicPr>
+          <p:nvPr>
+            <p:ph idx="1"/>
+          </p:nvPr>
+        </p:nvPicPr>
+        <p:blipFill>
+          <a:blip r:embed="rId2"/>
+          <a:srcRect r="8618"/>
+          <a:stretch>
+            <a:fillRect/>
+          </a:stretch>
+        </p:blipFill>
+        <p:spPr>
+          <a:xfrm>
+            <a:off x="4038599" y="10"/>
+            <a:ext cx="8160026" cy="6875809"/>
+          </a:xfrm>
+          <a:prstGeom prst="rect">
+            <a:avLst/>
+          </a:prstGeom>
+        </p:spPr>
+      </p:pic>
+      <p:sp>
+        <p:nvSpPr>
+          <p:cNvPr id="27" name="Freeform: Shape 26">
             <a:extLst>
               <a:ext uri="{FF2B5EF4-FFF2-40B4-BE49-F238E27FC236}">
                 <a16:creationId xmlns:a16="http://schemas.microsoft.com/office/drawing/2014/main" id="{5E81CCFB-7BEF-4186-86FB-D09450B4D02D}"/>

--- a/CS3080_Project_Presentation.pptx
+++ b/CS3080_Project_Presentation.pptx
@@ -4,6 +4,9 @@
   <p:sldMasterIdLst>
     <p:sldMasterId id="2147483648" r:id="rId1"/>
   </p:sldMasterIdLst>
+  <p:notesMasterIdLst>
+    <p:notesMasterId r:id="rId10"/>
+  </p:notesMasterIdLst>
   <p:sldIdLst>
     <p:sldId id="256" r:id="rId2"/>
     <p:sldId id="257" r:id="rId3"/>
@@ -11,6 +14,8 @@
     <p:sldId id="261" r:id="rId5"/>
     <p:sldId id="259" r:id="rId6"/>
     <p:sldId id="260" r:id="rId7"/>
+    <p:sldId id="262" r:id="rId8"/>
+    <p:sldId id="263" r:id="rId9"/>
   </p:sldIdLst>
   <p:sldSz cx="12192000" cy="6858000"/>
   <p:notesSz cx="6858000" cy="9144000"/>
@@ -117,6 +122,523 @@
 </p:presentation>
 </file>
 
+<file path=ppt/notesMasters/notesMaster1.xml><?xml version="1.0" encoding="utf-8"?>
+<p:notesMaster xmlns:a="http://schemas.openxmlformats.org/drawingml/2006/main" xmlns:r="http://schemas.openxmlformats.org/officeDocument/2006/relationships" xmlns:p="http://schemas.openxmlformats.org/presentationml/2006/main">
+  <p:cSld>
+    <p:bg>
+      <p:bgRef idx="1001">
+        <a:schemeClr val="bg1"/>
+      </p:bgRef>
+    </p:bg>
+    <p:spTree>
+      <p:nvGrpSpPr>
+        <p:cNvPr id="1" name=""/>
+        <p:cNvGrpSpPr/>
+        <p:nvPr/>
+      </p:nvGrpSpPr>
+      <p:grpSpPr>
+        <a:xfrm>
+          <a:off x="0" y="0"/>
+          <a:ext cx="0" cy="0"/>
+          <a:chOff x="0" y="0"/>
+          <a:chExt cx="0" cy="0"/>
+        </a:xfrm>
+      </p:grpSpPr>
+      <p:sp>
+        <p:nvSpPr>
+          <p:cNvPr id="2" name="Header Placeholder 1"/>
+          <p:cNvSpPr>
+            <a:spLocks noGrp="1"/>
+          </p:cNvSpPr>
+          <p:nvPr>
+            <p:ph type="hdr" sz="quarter"/>
+          </p:nvPr>
+        </p:nvSpPr>
+        <p:spPr>
+          <a:xfrm>
+            <a:off x="0" y="0"/>
+            <a:ext cx="2971800" cy="458788"/>
+          </a:xfrm>
+          <a:prstGeom prst="rect">
+            <a:avLst/>
+          </a:prstGeom>
+        </p:spPr>
+        <p:txBody>
+          <a:bodyPr vert="horz" lIns="91440" tIns="45720" rIns="91440" bIns="45720" rtlCol="0"/>
+          <a:lstStyle>
+            <a:lvl1pPr algn="l">
+              <a:defRPr sz="1200"/>
+            </a:lvl1pPr>
+          </a:lstStyle>
+          <a:p>
+            <a:endParaRPr lang="en-US"/>
+          </a:p>
+        </p:txBody>
+      </p:sp>
+      <p:sp>
+        <p:nvSpPr>
+          <p:cNvPr id="3" name="Date Placeholder 2"/>
+          <p:cNvSpPr>
+            <a:spLocks noGrp="1"/>
+          </p:cNvSpPr>
+          <p:nvPr>
+            <p:ph type="dt" idx="1"/>
+          </p:nvPr>
+        </p:nvSpPr>
+        <p:spPr>
+          <a:xfrm>
+            <a:off x="3884613" y="0"/>
+            <a:ext cx="2971800" cy="458788"/>
+          </a:xfrm>
+          <a:prstGeom prst="rect">
+            <a:avLst/>
+          </a:prstGeom>
+        </p:spPr>
+        <p:txBody>
+          <a:bodyPr vert="horz" lIns="91440" tIns="45720" rIns="91440" bIns="45720" rtlCol="0"/>
+          <a:lstStyle>
+            <a:lvl1pPr algn="r">
+              <a:defRPr sz="1200"/>
+            </a:lvl1pPr>
+          </a:lstStyle>
+          <a:p>
+            <a:fld id="{E9013859-9FC8-4602-8B22-1BA57C4A7C95}" type="datetimeFigureOut">
+              <a:rPr lang="en-US" smtClean="0"/>
+              <a:t>5/5/2026</a:t>
+            </a:fld>
+            <a:endParaRPr lang="en-US"/>
+          </a:p>
+        </p:txBody>
+      </p:sp>
+      <p:sp>
+        <p:nvSpPr>
+          <p:cNvPr id="4" name="Slide Image Placeholder 3"/>
+          <p:cNvSpPr>
+            <a:spLocks noGrp="1" noRot="1" noChangeAspect="1"/>
+          </p:cNvSpPr>
+          <p:nvPr>
+            <p:ph type="sldImg" idx="2"/>
+          </p:nvPr>
+        </p:nvSpPr>
+        <p:spPr>
+          <a:xfrm>
+            <a:off x="685800" y="1143000"/>
+            <a:ext cx="5486400" cy="3086100"/>
+          </a:xfrm>
+          <a:prstGeom prst="rect">
+            <a:avLst/>
+          </a:prstGeom>
+          <a:noFill/>
+          <a:ln w="12700">
+            <a:solidFill>
+              <a:prstClr val="black"/>
+            </a:solidFill>
+          </a:ln>
+        </p:spPr>
+        <p:txBody>
+          <a:bodyPr vert="horz" lIns="91440" tIns="45720" rIns="91440" bIns="45720" rtlCol="0" anchor="ctr"/>
+          <a:lstStyle/>
+          <a:p>
+            <a:endParaRPr lang="en-US"/>
+          </a:p>
+        </p:txBody>
+      </p:sp>
+      <p:sp>
+        <p:nvSpPr>
+          <p:cNvPr id="5" name="Notes Placeholder 4"/>
+          <p:cNvSpPr>
+            <a:spLocks noGrp="1"/>
+          </p:cNvSpPr>
+          <p:nvPr>
+            <p:ph type="body" sz="quarter" idx="3"/>
+          </p:nvPr>
+        </p:nvSpPr>
+        <p:spPr>
+          <a:xfrm>
+            <a:off x="685800" y="4400550"/>
+            <a:ext cx="5486400" cy="3600450"/>
+          </a:xfrm>
+          <a:prstGeom prst="rect">
+            <a:avLst/>
+          </a:prstGeom>
+        </p:spPr>
+        <p:txBody>
+          <a:bodyPr vert="horz" lIns="91440" tIns="45720" rIns="91440" bIns="45720" rtlCol="0"/>
+          <a:lstStyle/>
+          <a:p>
+            <a:pPr lvl="0"/>
+            <a:r>
+              <a:rPr lang="en-US"/>
+              <a:t>Click to edit Master text styles</a:t>
+            </a:r>
+          </a:p>
+          <a:p>
+            <a:pPr lvl="1"/>
+            <a:r>
+              <a:rPr lang="en-US"/>
+              <a:t>Second level</a:t>
+            </a:r>
+          </a:p>
+          <a:p>
+            <a:pPr lvl="2"/>
+            <a:r>
+              <a:rPr lang="en-US"/>
+              <a:t>Third level</a:t>
+            </a:r>
+          </a:p>
+          <a:p>
+            <a:pPr lvl="3"/>
+            <a:r>
+              <a:rPr lang="en-US"/>
+              <a:t>Fourth level</a:t>
+            </a:r>
+          </a:p>
+          <a:p>
+            <a:pPr lvl="4"/>
+            <a:r>
+              <a:rPr lang="en-US"/>
+              <a:t>Fifth level</a:t>
+            </a:r>
+          </a:p>
+        </p:txBody>
+      </p:sp>
+      <p:sp>
+        <p:nvSpPr>
+          <p:cNvPr id="6" name="Footer Placeholder 5"/>
+          <p:cNvSpPr>
+            <a:spLocks noGrp="1"/>
+          </p:cNvSpPr>
+          <p:nvPr>
+            <p:ph type="ftr" sz="quarter" idx="4"/>
+          </p:nvPr>
+        </p:nvSpPr>
+        <p:spPr>
+          <a:xfrm>
+            <a:off x="0" y="8685213"/>
+            <a:ext cx="2971800" cy="458787"/>
+          </a:xfrm>
+          <a:prstGeom prst="rect">
+            <a:avLst/>
+          </a:prstGeom>
+        </p:spPr>
+        <p:txBody>
+          <a:bodyPr vert="horz" lIns="91440" tIns="45720" rIns="91440" bIns="45720" rtlCol="0" anchor="b"/>
+          <a:lstStyle>
+            <a:lvl1pPr algn="l">
+              <a:defRPr sz="1200"/>
+            </a:lvl1pPr>
+          </a:lstStyle>
+          <a:p>
+            <a:endParaRPr lang="en-US"/>
+          </a:p>
+        </p:txBody>
+      </p:sp>
+      <p:sp>
+        <p:nvSpPr>
+          <p:cNvPr id="7" name="Slide Number Placeholder 6"/>
+          <p:cNvSpPr>
+            <a:spLocks noGrp="1"/>
+          </p:cNvSpPr>
+          <p:nvPr>
+            <p:ph type="sldNum" sz="quarter" idx="5"/>
+          </p:nvPr>
+        </p:nvSpPr>
+        <p:spPr>
+          <a:xfrm>
+            <a:off x="3884613" y="8685213"/>
+            <a:ext cx="2971800" cy="458787"/>
+          </a:xfrm>
+          <a:prstGeom prst="rect">
+            <a:avLst/>
+          </a:prstGeom>
+        </p:spPr>
+        <p:txBody>
+          <a:bodyPr vert="horz" lIns="91440" tIns="45720" rIns="91440" bIns="45720" rtlCol="0" anchor="b"/>
+          <a:lstStyle>
+            <a:lvl1pPr algn="r">
+              <a:defRPr sz="1200"/>
+            </a:lvl1pPr>
+          </a:lstStyle>
+          <a:p>
+            <a:fld id="{ECB4FCA9-8494-4F56-8FA5-838D269428B5}" type="slidenum">
+              <a:rPr lang="en-US" smtClean="0"/>
+              <a:t>‹#›</a:t>
+            </a:fld>
+            <a:endParaRPr lang="en-US"/>
+          </a:p>
+        </p:txBody>
+      </p:sp>
+    </p:spTree>
+    <p:extLst>
+      <p:ext uri="{BB962C8B-B14F-4D97-AF65-F5344CB8AC3E}">
+        <p14:creationId xmlns:p14="http://schemas.microsoft.com/office/powerpoint/2010/main" val="3044203860"/>
+      </p:ext>
+    </p:extLst>
+  </p:cSld>
+  <p:clrMap bg1="lt1" tx1="dk1" bg2="lt2" tx2="dk2" accent1="accent1" accent2="accent2" accent3="accent3" accent4="accent4" accent5="accent5" accent6="accent6" hlink="hlink" folHlink="folHlink"/>
+  <p:notesStyle>
+    <a:lvl1pPr marL="0" algn="l" defTabSz="914400" rtl="0" eaLnBrk="1" latinLnBrk="0" hangingPunct="1">
+      <a:defRPr sz="1200" kern="1200">
+        <a:solidFill>
+          <a:schemeClr val="tx1"/>
+        </a:solidFill>
+        <a:latin typeface="+mn-lt"/>
+        <a:ea typeface="+mn-ea"/>
+        <a:cs typeface="+mn-cs"/>
+      </a:defRPr>
+    </a:lvl1pPr>
+    <a:lvl2pPr marL="457200" algn="l" defTabSz="914400" rtl="0" eaLnBrk="1" latinLnBrk="0" hangingPunct="1">
+      <a:defRPr sz="1200" kern="1200">
+        <a:solidFill>
+          <a:schemeClr val="tx1"/>
+        </a:solidFill>
+        <a:latin typeface="+mn-lt"/>
+        <a:ea typeface="+mn-ea"/>
+        <a:cs typeface="+mn-cs"/>
+      </a:defRPr>
+    </a:lvl2pPr>
+    <a:lvl3pPr marL="914400" algn="l" defTabSz="914400" rtl="0" eaLnBrk="1" latinLnBrk="0" hangingPunct="1">
+      <a:defRPr sz="1200" kern="1200">
+        <a:solidFill>
+          <a:schemeClr val="tx1"/>
+        </a:solidFill>
+        <a:latin typeface="+mn-lt"/>
+        <a:ea typeface="+mn-ea"/>
+        <a:cs typeface="+mn-cs"/>
+      </a:defRPr>
+    </a:lvl3pPr>
+    <a:lvl4pPr marL="1371600" algn="l" defTabSz="914400" rtl="0" eaLnBrk="1" latinLnBrk="0" hangingPunct="1">
+      <a:defRPr sz="1200" kern="1200">
+        <a:solidFill>
+          <a:schemeClr val="tx1"/>
+        </a:solidFill>
+        <a:latin typeface="+mn-lt"/>
+        <a:ea typeface="+mn-ea"/>
+        <a:cs typeface="+mn-cs"/>
+      </a:defRPr>
+    </a:lvl4pPr>
+    <a:lvl5pPr marL="1828800" algn="l" defTabSz="914400" rtl="0" eaLnBrk="1" latinLnBrk="0" hangingPunct="1">
+      <a:defRPr sz="1200" kern="1200">
+        <a:solidFill>
+          <a:schemeClr val="tx1"/>
+        </a:solidFill>
+        <a:latin typeface="+mn-lt"/>
+        <a:ea typeface="+mn-ea"/>
+        <a:cs typeface="+mn-cs"/>
+      </a:defRPr>
+    </a:lvl5pPr>
+    <a:lvl6pPr marL="2286000" algn="l" defTabSz="914400" rtl="0" eaLnBrk="1" latinLnBrk="0" hangingPunct="1">
+      <a:defRPr sz="1200" kern="1200">
+        <a:solidFill>
+          <a:schemeClr val="tx1"/>
+        </a:solidFill>
+        <a:latin typeface="+mn-lt"/>
+        <a:ea typeface="+mn-ea"/>
+        <a:cs typeface="+mn-cs"/>
+      </a:defRPr>
+    </a:lvl6pPr>
+    <a:lvl7pPr marL="2743200" algn="l" defTabSz="914400" rtl="0" eaLnBrk="1" latinLnBrk="0" hangingPunct="1">
+      <a:defRPr sz="1200" kern="1200">
+        <a:solidFill>
+          <a:schemeClr val="tx1"/>
+        </a:solidFill>
+        <a:latin typeface="+mn-lt"/>
+        <a:ea typeface="+mn-ea"/>
+        <a:cs typeface="+mn-cs"/>
+      </a:defRPr>
+    </a:lvl7pPr>
+    <a:lvl8pPr marL="3200400" algn="l" defTabSz="914400" rtl="0" eaLnBrk="1" latinLnBrk="0" hangingPunct="1">
+      <a:defRPr sz="1200" kern="1200">
+        <a:solidFill>
+          <a:schemeClr val="tx1"/>
+        </a:solidFill>
+        <a:latin typeface="+mn-lt"/>
+        <a:ea typeface="+mn-ea"/>
+        <a:cs typeface="+mn-cs"/>
+      </a:defRPr>
+    </a:lvl8pPr>
+    <a:lvl9pPr marL="3657600" algn="l" defTabSz="914400" rtl="0" eaLnBrk="1" latinLnBrk="0" hangingPunct="1">
+      <a:defRPr sz="1200" kern="1200">
+        <a:solidFill>
+          <a:schemeClr val="tx1"/>
+        </a:solidFill>
+        <a:latin typeface="+mn-lt"/>
+        <a:ea typeface="+mn-ea"/>
+        <a:cs typeface="+mn-cs"/>
+      </a:defRPr>
+    </a:lvl9pPr>
+  </p:notesStyle>
+</p:notesMaster>
+</file>
+
+<file path=ppt/notesSlides/notesSlide1.xml><?xml version="1.0" encoding="utf-8"?>
+<p:notes xmlns:a="http://schemas.openxmlformats.org/drawingml/2006/main" xmlns:r="http://schemas.openxmlformats.org/officeDocument/2006/relationships" xmlns:p="http://schemas.openxmlformats.org/presentationml/2006/main">
+  <p:cSld>
+    <p:spTree>
+      <p:nvGrpSpPr>
+        <p:cNvPr id="1" name=""/>
+        <p:cNvGrpSpPr/>
+        <p:nvPr/>
+      </p:nvGrpSpPr>
+      <p:grpSpPr>
+        <a:xfrm>
+          <a:off x="0" y="0"/>
+          <a:ext cx="0" cy="0"/>
+          <a:chOff x="0" y="0"/>
+          <a:chExt cx="0" cy="0"/>
+        </a:xfrm>
+      </p:grpSpPr>
+      <p:sp>
+        <p:nvSpPr>
+          <p:cNvPr id="2" name="Slide Image Placeholder 1"/>
+          <p:cNvSpPr>
+            <a:spLocks noGrp="1" noRot="1" noChangeAspect="1"/>
+          </p:cNvSpPr>
+          <p:nvPr>
+            <p:ph type="sldImg"/>
+          </p:nvPr>
+        </p:nvSpPr>
+        <p:spPr/>
+      </p:sp>
+      <p:sp>
+        <p:nvSpPr>
+          <p:cNvPr id="3" name="Notes Placeholder 2"/>
+          <p:cNvSpPr>
+            <a:spLocks noGrp="1"/>
+          </p:cNvSpPr>
+          <p:nvPr>
+            <p:ph type="body" idx="1"/>
+          </p:nvPr>
+        </p:nvSpPr>
+        <p:spPr/>
+        <p:txBody>
+          <a:bodyPr/>
+          <a:lstStyle/>
+          <a:p>
+            <a:endParaRPr lang="en-US" dirty="0"/>
+          </a:p>
+        </p:txBody>
+      </p:sp>
+      <p:sp>
+        <p:nvSpPr>
+          <p:cNvPr id="4" name="Slide Number Placeholder 3"/>
+          <p:cNvSpPr>
+            <a:spLocks noGrp="1"/>
+          </p:cNvSpPr>
+          <p:nvPr>
+            <p:ph type="sldNum" sz="quarter" idx="5"/>
+          </p:nvPr>
+        </p:nvSpPr>
+        <p:spPr/>
+        <p:txBody>
+          <a:bodyPr/>
+          <a:lstStyle/>
+          <a:p>
+            <a:fld id="{ECB4FCA9-8494-4F56-8FA5-838D269428B5}" type="slidenum">
+              <a:rPr lang="en-US" smtClean="0"/>
+              <a:t>5</a:t>
+            </a:fld>
+            <a:endParaRPr lang="en-US"/>
+          </a:p>
+        </p:txBody>
+      </p:sp>
+    </p:spTree>
+    <p:extLst>
+      <p:ext uri="{BB962C8B-B14F-4D97-AF65-F5344CB8AC3E}">
+        <p14:creationId xmlns:p14="http://schemas.microsoft.com/office/powerpoint/2010/main" val="2200186525"/>
+      </p:ext>
+    </p:extLst>
+  </p:cSld>
+  <p:clrMapOvr>
+    <a:masterClrMapping/>
+  </p:clrMapOvr>
+</p:notes>
+</file>
+
+<file path=ppt/notesSlides/notesSlide2.xml><?xml version="1.0" encoding="utf-8"?>
+<p:notes xmlns:a="http://schemas.openxmlformats.org/drawingml/2006/main" xmlns:r="http://schemas.openxmlformats.org/officeDocument/2006/relationships" xmlns:p="http://schemas.openxmlformats.org/presentationml/2006/main">
+  <p:cSld>
+    <p:spTree>
+      <p:nvGrpSpPr>
+        <p:cNvPr id="1" name=""/>
+        <p:cNvGrpSpPr/>
+        <p:nvPr/>
+      </p:nvGrpSpPr>
+      <p:grpSpPr>
+        <a:xfrm>
+          <a:off x="0" y="0"/>
+          <a:ext cx="0" cy="0"/>
+          <a:chOff x="0" y="0"/>
+          <a:chExt cx="0" cy="0"/>
+        </a:xfrm>
+      </p:grpSpPr>
+      <p:sp>
+        <p:nvSpPr>
+          <p:cNvPr id="2" name="Slide Image Placeholder 1"/>
+          <p:cNvSpPr>
+            <a:spLocks noGrp="1" noRot="1" noChangeAspect="1"/>
+          </p:cNvSpPr>
+          <p:nvPr>
+            <p:ph type="sldImg"/>
+          </p:nvPr>
+        </p:nvSpPr>
+        <p:spPr/>
+      </p:sp>
+      <p:sp>
+        <p:nvSpPr>
+          <p:cNvPr id="3" name="Notes Placeholder 2"/>
+          <p:cNvSpPr>
+            <a:spLocks noGrp="1"/>
+          </p:cNvSpPr>
+          <p:nvPr>
+            <p:ph type="body" idx="1"/>
+          </p:nvPr>
+        </p:nvSpPr>
+        <p:spPr/>
+        <p:txBody>
+          <a:bodyPr/>
+          <a:lstStyle/>
+          <a:p>
+            <a:endParaRPr lang="en-US" dirty="0"/>
+          </a:p>
+        </p:txBody>
+      </p:sp>
+      <p:sp>
+        <p:nvSpPr>
+          <p:cNvPr id="4" name="Slide Number Placeholder 3"/>
+          <p:cNvSpPr>
+            <a:spLocks noGrp="1"/>
+          </p:cNvSpPr>
+          <p:nvPr>
+            <p:ph type="sldNum" sz="quarter" idx="5"/>
+          </p:nvPr>
+        </p:nvSpPr>
+        <p:spPr/>
+        <p:txBody>
+          <a:bodyPr/>
+          <a:lstStyle/>
+          <a:p>
+            <a:fld id="{ECB4FCA9-8494-4F56-8FA5-838D269428B5}" type="slidenum">
+              <a:rPr lang="en-US" smtClean="0"/>
+              <a:t>7</a:t>
+            </a:fld>
+            <a:endParaRPr lang="en-US"/>
+          </a:p>
+        </p:txBody>
+      </p:sp>
+    </p:spTree>
+    <p:extLst>
+      <p:ext uri="{BB962C8B-B14F-4D97-AF65-F5344CB8AC3E}">
+        <p14:creationId xmlns:p14="http://schemas.microsoft.com/office/powerpoint/2010/main" val="2203245257"/>
+      </p:ext>
+    </p:extLst>
+  </p:cSld>
+  <p:clrMapOvr>
+    <a:masterClrMapping/>
+  </p:clrMapOvr>
+</p:notes>
+</file>
+
 <file path=ppt/slideLayouts/slideLayout1.xml><?xml version="1.0" encoding="utf-8"?>
 <p:sldLayout xmlns:a="http://schemas.openxmlformats.org/drawingml/2006/main" xmlns:r="http://schemas.openxmlformats.org/officeDocument/2006/relationships" xmlns:p="http://schemas.openxmlformats.org/presentationml/2006/main" type="title" preserve="1">
   <p:cSld name="Title Slide">
@@ -264,7 +786,7 @@
           <a:p>
             <a:fld id="{4A227F7C-5135-49D1-B6CF-8F631C0E6D17}" type="datetimeFigureOut">
               <a:rPr lang="en-US" smtClean="0"/>
-              <a:t>5/4/2026</a:t>
+              <a:t>5/5/2026</a:t>
             </a:fld>
             <a:endParaRPr lang="en-US"/>
           </a:p>
@@ -462,7 +984,7 @@
           <a:p>
             <a:fld id="{4A227F7C-5135-49D1-B6CF-8F631C0E6D17}" type="datetimeFigureOut">
               <a:rPr lang="en-US" smtClean="0"/>
-              <a:t>5/4/2026</a:t>
+              <a:t>5/5/2026</a:t>
             </a:fld>
             <a:endParaRPr lang="en-US"/>
           </a:p>
@@ -670,7 +1192,7 @@
           <a:p>
             <a:fld id="{4A227F7C-5135-49D1-B6CF-8F631C0E6D17}" type="datetimeFigureOut">
               <a:rPr lang="en-US" smtClean="0"/>
-              <a:t>5/4/2026</a:t>
+              <a:t>5/5/2026</a:t>
             </a:fld>
             <a:endParaRPr lang="en-US"/>
           </a:p>
@@ -868,7 +1390,7 @@
           <a:p>
             <a:fld id="{4A227F7C-5135-49D1-B6CF-8F631C0E6D17}" type="datetimeFigureOut">
               <a:rPr lang="en-US" smtClean="0"/>
-              <a:t>5/4/2026</a:t>
+              <a:t>5/5/2026</a:t>
             </a:fld>
             <a:endParaRPr lang="en-US"/>
           </a:p>
@@ -1143,7 +1665,7 @@
           <a:p>
             <a:fld id="{4A227F7C-5135-49D1-B6CF-8F631C0E6D17}" type="datetimeFigureOut">
               <a:rPr lang="en-US" smtClean="0"/>
-              <a:t>5/4/2026</a:t>
+              <a:t>5/5/2026</a:t>
             </a:fld>
             <a:endParaRPr lang="en-US"/>
           </a:p>
@@ -1408,7 +1930,7 @@
           <a:p>
             <a:fld id="{4A227F7C-5135-49D1-B6CF-8F631C0E6D17}" type="datetimeFigureOut">
               <a:rPr lang="en-US" smtClean="0"/>
-              <a:t>5/4/2026</a:t>
+              <a:t>5/5/2026</a:t>
             </a:fld>
             <a:endParaRPr lang="en-US"/>
           </a:p>
@@ -1820,7 +2342,7 @@
           <a:p>
             <a:fld id="{4A227F7C-5135-49D1-B6CF-8F631C0E6D17}" type="datetimeFigureOut">
               <a:rPr lang="en-US" smtClean="0"/>
-              <a:t>5/4/2026</a:t>
+              <a:t>5/5/2026</a:t>
             </a:fld>
             <a:endParaRPr lang="en-US"/>
           </a:p>
@@ -1961,7 +2483,7 @@
           <a:p>
             <a:fld id="{4A227F7C-5135-49D1-B6CF-8F631C0E6D17}" type="datetimeFigureOut">
               <a:rPr lang="en-US" smtClean="0"/>
-              <a:t>5/4/2026</a:t>
+              <a:t>5/5/2026</a:t>
             </a:fld>
             <a:endParaRPr lang="en-US"/>
           </a:p>
@@ -2074,7 +2596,7 @@
           <a:p>
             <a:fld id="{4A227F7C-5135-49D1-B6CF-8F631C0E6D17}" type="datetimeFigureOut">
               <a:rPr lang="en-US" smtClean="0"/>
-              <a:t>5/4/2026</a:t>
+              <a:t>5/5/2026</a:t>
             </a:fld>
             <a:endParaRPr lang="en-US"/>
           </a:p>
@@ -2385,7 +2907,7 @@
           <a:p>
             <a:fld id="{4A227F7C-5135-49D1-B6CF-8F631C0E6D17}" type="datetimeFigureOut">
               <a:rPr lang="en-US" smtClean="0"/>
-              <a:t>5/4/2026</a:t>
+              <a:t>5/5/2026</a:t>
             </a:fld>
             <a:endParaRPr lang="en-US"/>
           </a:p>
@@ -2673,7 +3195,7 @@
           <a:p>
             <a:fld id="{4A227F7C-5135-49D1-B6CF-8F631C0E6D17}" type="datetimeFigureOut">
               <a:rPr lang="en-US" smtClean="0"/>
-              <a:t>5/4/2026</a:t>
+              <a:t>5/5/2026</a:t>
             </a:fld>
             <a:endParaRPr lang="en-US"/>
           </a:p>
@@ -2914,7 +3436,7 @@
           <a:p>
             <a:fld id="{4A227F7C-5135-49D1-B6CF-8F631C0E6D17}" type="datetimeFigureOut">
               <a:rPr lang="en-US" smtClean="0"/>
-              <a:t>5/4/2026</a:t>
+              <a:t>5/5/2026</a:t>
             </a:fld>
             <a:endParaRPr lang="en-US"/>
           </a:p>
@@ -5406,7 +5928,7 @@
                   </a:schemeClr>
                 </a:solidFill>
               </a:rPr>
-              <a:t>Increments of 100</a:t>
+              <a:t>Increases with speed value</a:t>
             </a:r>
           </a:p>
         </p:txBody>
@@ -6037,19 +6559,17 @@
       </p:sp>
       <p:pic>
         <p:nvPicPr>
-          <p:cNvPr id="11" name="Content Placeholder 10">
-            <a:extLst>
-              <a:ext uri="{FF2B5EF4-FFF2-40B4-BE49-F238E27FC236}">
-                <a16:creationId xmlns:a16="http://schemas.microsoft.com/office/drawing/2014/main" id="{6B183045-37F2-BAEB-951F-99D0FB12F3F3}"/>
+          <p:cNvPr id="13" name="Picture 12">
+            <a:extLst>
+              <a:ext uri="{FF2B5EF4-FFF2-40B4-BE49-F238E27FC236}">
+                <a16:creationId xmlns:a16="http://schemas.microsoft.com/office/drawing/2014/main" id="{2C55205E-B006-F66F-9522-B3B5014A1014}"/>
               </a:ext>
             </a:extLst>
           </p:cNvPr>
           <p:cNvPicPr>
-            <a:picLocks noGrp="1" noChangeAspect="1"/>
+            <a:picLocks noChangeAspect="1"/>
           </p:cNvPicPr>
-          <p:nvPr>
-            <p:ph idx="1"/>
-          </p:nvPr>
+          <p:nvPr/>
         </p:nvPicPr>
         <p:blipFill>
           <a:blip r:embed="rId2"/>
@@ -6059,8 +6579,8 @@
         </p:blipFill>
         <p:spPr>
           <a:xfrm>
-            <a:off x="715748" y="2194292"/>
-            <a:ext cx="5131088" cy="3971905"/>
+            <a:off x="6562584" y="1576447"/>
+            <a:ext cx="3755923" cy="5271472"/>
           </a:xfrm>
           <a:prstGeom prst="rect">
             <a:avLst/>
@@ -6069,17 +6589,19 @@
       </p:pic>
       <p:pic>
         <p:nvPicPr>
-          <p:cNvPr id="13" name="Picture 12">
-            <a:extLst>
-              <a:ext uri="{FF2B5EF4-FFF2-40B4-BE49-F238E27FC236}">
-                <a16:creationId xmlns:a16="http://schemas.microsoft.com/office/drawing/2014/main" id="{2C55205E-B006-F66F-9522-B3B5014A1014}"/>
+          <p:cNvPr id="6" name="Content Placeholder 5">
+            <a:extLst>
+              <a:ext uri="{FF2B5EF4-FFF2-40B4-BE49-F238E27FC236}">
+                <a16:creationId xmlns:a16="http://schemas.microsoft.com/office/drawing/2014/main" id="{8B59FAFD-217B-7F03-4413-B706DFE48E52}"/>
               </a:ext>
             </a:extLst>
           </p:cNvPr>
           <p:cNvPicPr>
-            <a:picLocks noChangeAspect="1"/>
+            <a:picLocks noGrp="1" noChangeAspect="1"/>
           </p:cNvPicPr>
-          <p:nvPr/>
+          <p:nvPr>
+            <p:ph idx="1"/>
+          </p:nvPr>
         </p:nvPicPr>
         <p:blipFill>
           <a:blip r:embed="rId3"/>
@@ -6089,8 +6611,8 @@
         </p:blipFill>
         <p:spPr>
           <a:xfrm>
-            <a:off x="6562584" y="1576447"/>
-            <a:ext cx="3755923" cy="5271472"/>
+            <a:off x="289212" y="1775799"/>
+            <a:ext cx="5806788" cy="4507013"/>
           </a:xfrm>
           <a:prstGeom prst="rect">
             <a:avLst/>
@@ -6652,10 +7174,10 @@
       </p:sp>
       <p:pic>
         <p:nvPicPr>
-          <p:cNvPr id="4" name="Content Placeholder 3">
-            <a:extLst>
-              <a:ext uri="{FF2B5EF4-FFF2-40B4-BE49-F238E27FC236}">
-                <a16:creationId xmlns:a16="http://schemas.microsoft.com/office/drawing/2014/main" id="{77D90E08-571D-7557-43FC-29B8BBD12479}"/>
+          <p:cNvPr id="7" name="Content Placeholder 6">
+            <a:extLst>
+              <a:ext uri="{FF2B5EF4-FFF2-40B4-BE49-F238E27FC236}">
+                <a16:creationId xmlns:a16="http://schemas.microsoft.com/office/drawing/2014/main" id="{8A781C97-ED65-26E2-92A7-C8E3E812B96F}"/>
               </a:ext>
             </a:extLst>
           </p:cNvPr>
@@ -6674,8 +7196,38 @@
         </p:blipFill>
         <p:spPr>
           <a:xfrm>
-            <a:off x="4038604" y="845422"/>
-            <a:ext cx="8153396" cy="4667817"/>
+            <a:off x="4143839" y="100297"/>
+            <a:ext cx="7926241" cy="3586800"/>
+          </a:xfrm>
+          <a:prstGeom prst="rect">
+            <a:avLst/>
+          </a:prstGeom>
+        </p:spPr>
+      </p:pic>
+      <p:pic>
+        <p:nvPicPr>
+          <p:cNvPr id="10" name="Picture 9">
+            <a:extLst>
+              <a:ext uri="{FF2B5EF4-FFF2-40B4-BE49-F238E27FC236}">
+                <a16:creationId xmlns:a16="http://schemas.microsoft.com/office/drawing/2014/main" id="{1FA4F15D-B466-87CB-D368-E807DD37C77F}"/>
+              </a:ext>
+            </a:extLst>
+          </p:cNvPr>
+          <p:cNvPicPr>
+            <a:picLocks noChangeAspect="1"/>
+          </p:cNvPicPr>
+          <p:nvPr/>
+        </p:nvPicPr>
+        <p:blipFill>
+          <a:blip r:embed="rId3"/>
+          <a:stretch>
+            <a:fillRect/>
+          </a:stretch>
+        </p:blipFill>
+        <p:spPr>
+          <a:xfrm>
+            <a:off x="4164163" y="3787394"/>
+            <a:ext cx="8007514" cy="2497393"/>
           </a:xfrm>
           <a:prstGeom prst="rect">
             <a:avLst/>
@@ -6929,39 +7481,6 @@
           </a:p>
         </p:txBody>
       </p:sp>
-      <p:pic>
-        <p:nvPicPr>
-          <p:cNvPr id="9" name="Content Placeholder 8">
-            <a:extLst>
-              <a:ext uri="{FF2B5EF4-FFF2-40B4-BE49-F238E27FC236}">
-                <a16:creationId xmlns:a16="http://schemas.microsoft.com/office/drawing/2014/main" id="{376FF8CD-F849-729F-5D1C-94538062A7C7}"/>
-              </a:ext>
-            </a:extLst>
-          </p:cNvPr>
-          <p:cNvPicPr>
-            <a:picLocks noGrp="1" noChangeAspect="1"/>
-          </p:cNvPicPr>
-          <p:nvPr>
-            <p:ph idx="1"/>
-          </p:nvPr>
-        </p:nvPicPr>
-        <p:blipFill>
-          <a:blip r:embed="rId2"/>
-          <a:srcRect r="20486"/>
-          <a:stretch>
-            <a:fillRect/>
-          </a:stretch>
-        </p:blipFill>
-        <p:spPr>
-          <a:xfrm>
-            <a:off x="4038599" y="10"/>
-            <a:ext cx="8160026" cy="6875809"/>
-          </a:xfrm>
-          <a:prstGeom prst="rect">
-            <a:avLst/>
-          </a:prstGeom>
-        </p:spPr>
-      </p:pic>
       <p:sp>
         <p:nvSpPr>
           <p:cNvPr id="45" name="Freeform: Shape 44">
@@ -7175,6 +7694,38 @@
           </a:p>
         </p:txBody>
       </p:sp>
+      <p:pic>
+        <p:nvPicPr>
+          <p:cNvPr id="6" name="Content Placeholder 5">
+            <a:extLst>
+              <a:ext uri="{FF2B5EF4-FFF2-40B4-BE49-F238E27FC236}">
+                <a16:creationId xmlns:a16="http://schemas.microsoft.com/office/drawing/2014/main" id="{9AB33AF2-DB10-93B6-9B17-056170F1415C}"/>
+              </a:ext>
+            </a:extLst>
+          </p:cNvPr>
+          <p:cNvPicPr>
+            <a:picLocks noGrp="1" noChangeAspect="1"/>
+          </p:cNvPicPr>
+          <p:nvPr>
+            <p:ph idx="1"/>
+          </p:nvPr>
+        </p:nvPicPr>
+        <p:blipFill>
+          <a:blip r:embed="rId3"/>
+          <a:stretch>
+            <a:fillRect/>
+          </a:stretch>
+        </p:blipFill>
+        <p:spPr>
+          <a:xfrm>
+            <a:off x="4054075" y="624484"/>
+            <a:ext cx="8120314" cy="5626849"/>
+          </a:xfrm>
+          <a:prstGeom prst="rect">
+            <a:avLst/>
+          </a:prstGeom>
+        </p:spPr>
+      </p:pic>
     </p:spTree>
     <p:extLst>
       <p:ext uri="{BB962C8B-B14F-4D97-AF65-F5344CB8AC3E}">
@@ -7422,39 +7973,6 @@
           </a:p>
         </p:txBody>
       </p:sp>
-      <p:pic>
-        <p:nvPicPr>
-          <p:cNvPr id="9" name="Content Placeholder 8">
-            <a:extLst>
-              <a:ext uri="{FF2B5EF4-FFF2-40B4-BE49-F238E27FC236}">
-                <a16:creationId xmlns:a16="http://schemas.microsoft.com/office/drawing/2014/main" id="{779FF403-B31D-BCA4-DA73-B4EDF8861EAD}"/>
-              </a:ext>
-            </a:extLst>
-          </p:cNvPr>
-          <p:cNvPicPr>
-            <a:picLocks noGrp="1" noChangeAspect="1"/>
-          </p:cNvPicPr>
-          <p:nvPr>
-            <p:ph idx="1"/>
-          </p:nvPr>
-        </p:nvPicPr>
-        <p:blipFill>
-          <a:blip r:embed="rId2"/>
-          <a:srcRect r="8618"/>
-          <a:stretch>
-            <a:fillRect/>
-          </a:stretch>
-        </p:blipFill>
-        <p:spPr>
-          <a:xfrm>
-            <a:off x="4038599" y="10"/>
-            <a:ext cx="8160026" cy="6875809"/>
-          </a:xfrm>
-          <a:prstGeom prst="rect">
-            <a:avLst/>
-          </a:prstGeom>
-        </p:spPr>
-      </p:pic>
       <p:sp>
         <p:nvSpPr>
           <p:cNvPr id="27" name="Freeform: Shape 26">
@@ -7668,10 +8186,1033 @@
           </a:p>
         </p:txBody>
       </p:sp>
+      <p:pic>
+        <p:nvPicPr>
+          <p:cNvPr id="6" name="Content Placeholder 5">
+            <a:extLst>
+              <a:ext uri="{FF2B5EF4-FFF2-40B4-BE49-F238E27FC236}">
+                <a16:creationId xmlns:a16="http://schemas.microsoft.com/office/drawing/2014/main" id="{E1C0395E-69F3-24FB-A7AD-2180D5FBAB4B}"/>
+              </a:ext>
+            </a:extLst>
+          </p:cNvPr>
+          <p:cNvPicPr>
+            <a:picLocks noGrp="1" noChangeAspect="1"/>
+          </p:cNvPicPr>
+          <p:nvPr>
+            <p:ph idx="1"/>
+          </p:nvPr>
+        </p:nvPicPr>
+        <p:blipFill>
+          <a:blip r:embed="rId2"/>
+          <a:stretch>
+            <a:fillRect/>
+          </a:stretch>
+        </p:blipFill>
+        <p:spPr>
+          <a:xfrm>
+            <a:off x="4038603" y="9500"/>
+            <a:ext cx="7474971" cy="6812166"/>
+          </a:xfrm>
+          <a:prstGeom prst="rect">
+            <a:avLst/>
+          </a:prstGeom>
+        </p:spPr>
+      </p:pic>
     </p:spTree>
     <p:extLst>
       <p:ext uri="{BB962C8B-B14F-4D97-AF65-F5344CB8AC3E}">
         <p14:creationId xmlns:p14="http://schemas.microsoft.com/office/powerpoint/2010/main" val="3122901497"/>
+      </p:ext>
+    </p:extLst>
+  </p:cSld>
+  <p:clrMapOvr>
+    <a:masterClrMapping/>
+  </p:clrMapOvr>
+</p:sld>
+</file>
+
+<file path=ppt/slides/slide7.xml><?xml version="1.0" encoding="utf-8"?>
+<p:sld xmlns:a="http://schemas.openxmlformats.org/drawingml/2006/main" xmlns:r="http://schemas.openxmlformats.org/officeDocument/2006/relationships" xmlns:p="http://schemas.openxmlformats.org/presentationml/2006/main">
+  <p:cSld>
+    <p:bg>
+      <p:bgPr>
+        <a:solidFill>
+          <a:schemeClr val="bg1"/>
+        </a:solidFill>
+        <a:effectLst/>
+      </p:bgPr>
+    </p:bg>
+    <p:spTree>
+      <p:nvGrpSpPr>
+        <p:cNvPr id="1" name="">
+          <a:extLst>
+            <a:ext uri="{FF2B5EF4-FFF2-40B4-BE49-F238E27FC236}">
+              <a16:creationId xmlns:a16="http://schemas.microsoft.com/office/drawing/2014/main" id="{E7B2FEF0-AE93-DF3D-A51E-80A0682DB062}"/>
+            </a:ext>
+          </a:extLst>
+        </p:cNvPr>
+        <p:cNvGrpSpPr/>
+        <p:nvPr/>
+      </p:nvGrpSpPr>
+      <p:grpSpPr>
+        <a:xfrm>
+          <a:off x="0" y="0"/>
+          <a:ext cx="0" cy="0"/>
+          <a:chOff x="0" y="0"/>
+          <a:chExt cx="0" cy="0"/>
+        </a:xfrm>
+      </p:grpSpPr>
+      <p:sp useBgFill="1">
+        <p:nvSpPr>
+          <p:cNvPr id="21" name="Rectangle 20">
+            <a:extLst>
+              <a:ext uri="{FF2B5EF4-FFF2-40B4-BE49-F238E27FC236}">
+                <a16:creationId xmlns:a16="http://schemas.microsoft.com/office/drawing/2014/main" id="{69359FFD-453E-7054-B6CD-1DEE606678BA}"/>
+              </a:ext>
+              <a:ext uri="{C183D7F6-B498-43B3-948B-1728B52AA6E4}">
+                <adec:decorative xmlns:adec="http://schemas.microsoft.com/office/drawing/2017/decorative" val="1"/>
+              </a:ext>
+            </a:extLst>
+          </p:cNvPr>
+          <p:cNvSpPr>
+            <a:spLocks noGrp="1" noRot="1" noChangeAspect="1" noMove="1" noResize="1" noEditPoints="1" noAdjustHandles="1" noChangeArrowheads="1" noChangeShapeType="1" noTextEdit="1"/>
+          </p:cNvSpPr>
+          <p:nvPr>
+            <p:extLst>
+              <p:ext uri="{386F3935-93C4-4BCD-93E2-E3B085C9AB24}">
+                <p16:designElem xmlns:p16="http://schemas.microsoft.com/office/powerpoint/2015/main" val="1"/>
+              </p:ext>
+            </p:extLst>
+          </p:nvPr>
+        </p:nvSpPr>
+        <p:spPr>
+          <a:xfrm>
+            <a:off x="0" y="2"/>
+            <a:ext cx="12192000" cy="6857997"/>
+          </a:xfrm>
+          <a:prstGeom prst="rect">
+            <a:avLst/>
+          </a:prstGeom>
+          <a:ln>
+            <a:noFill/>
+          </a:ln>
+        </p:spPr>
+        <p:style>
+          <a:lnRef idx="2">
+            <a:schemeClr val="accent1">
+              <a:shade val="50000"/>
+            </a:schemeClr>
+          </a:lnRef>
+          <a:fillRef idx="1">
+            <a:schemeClr val="accent1"/>
+          </a:fillRef>
+          <a:effectRef idx="0">
+            <a:schemeClr val="accent1"/>
+          </a:effectRef>
+          <a:fontRef idx="minor">
+            <a:schemeClr val="lt1"/>
+          </a:fontRef>
+        </p:style>
+        <p:txBody>
+          <a:bodyPr rtlCol="0" anchor="ctr"/>
+          <a:lstStyle/>
+          <a:p>
+            <a:pPr algn="ctr"/>
+            <a:endParaRPr lang="en-US"/>
+          </a:p>
+        </p:txBody>
+      </p:sp>
+      <p:sp>
+        <p:nvSpPr>
+          <p:cNvPr id="23" name="Rectangle 22">
+            <a:extLst>
+              <a:ext uri="{FF2B5EF4-FFF2-40B4-BE49-F238E27FC236}">
+                <a16:creationId xmlns:a16="http://schemas.microsoft.com/office/drawing/2014/main" id="{6C0F2870-D9DC-6ABD-5252-9C583FEBA666}"/>
+              </a:ext>
+              <a:ext uri="{C183D7F6-B498-43B3-948B-1728B52AA6E4}">
+                <adec:decorative xmlns:adec="http://schemas.microsoft.com/office/drawing/2017/decorative" val="1"/>
+              </a:ext>
+            </a:extLst>
+          </p:cNvPr>
+          <p:cNvSpPr>
+            <a:spLocks noGrp="1" noRot="1" noChangeAspect="1" noMove="1" noResize="1" noEditPoints="1" noAdjustHandles="1" noChangeArrowheads="1" noChangeShapeType="1" noTextEdit="1"/>
+          </p:cNvSpPr>
+          <p:nvPr>
+            <p:extLst>
+              <p:ext uri="{386F3935-93C4-4BCD-93E2-E3B085C9AB24}">
+                <p16:designElem xmlns:p16="http://schemas.microsoft.com/office/powerpoint/2015/main" val="1"/>
+              </p:ext>
+            </p:extLst>
+          </p:nvPr>
+        </p:nvSpPr>
+        <p:spPr>
+          <a:xfrm rot="5400000" flipH="1">
+            <a:off x="-1417539" y="1417538"/>
+            <a:ext cx="6875818" cy="4040744"/>
+          </a:xfrm>
+          <a:prstGeom prst="rect">
+            <a:avLst/>
+          </a:prstGeom>
+          <a:gradFill>
+            <a:gsLst>
+              <a:gs pos="11000">
+                <a:srgbClr val="000000"/>
+              </a:gs>
+              <a:gs pos="100000">
+                <a:schemeClr val="accent1">
+                  <a:lumMod val="75000"/>
+                </a:schemeClr>
+              </a:gs>
+            </a:gsLst>
+            <a:lin ang="18600000" scaled="0"/>
+          </a:gradFill>
+          <a:ln>
+            <a:noFill/>
+          </a:ln>
+        </p:spPr>
+        <p:style>
+          <a:lnRef idx="2">
+            <a:schemeClr val="accent1">
+              <a:shade val="50000"/>
+            </a:schemeClr>
+          </a:lnRef>
+          <a:fillRef idx="1">
+            <a:schemeClr val="accent1"/>
+          </a:fillRef>
+          <a:effectRef idx="0">
+            <a:schemeClr val="accent1"/>
+          </a:effectRef>
+          <a:fontRef idx="minor">
+            <a:schemeClr val="lt1"/>
+          </a:fontRef>
+        </p:style>
+        <p:txBody>
+          <a:bodyPr rtlCol="0" anchor="ctr"/>
+          <a:lstStyle/>
+          <a:p>
+            <a:pPr algn="ctr"/>
+            <a:endParaRPr lang="en-US" dirty="0"/>
+          </a:p>
+        </p:txBody>
+      </p:sp>
+      <p:sp>
+        <p:nvSpPr>
+          <p:cNvPr id="25" name="Rectangle 24">
+            <a:extLst>
+              <a:ext uri="{FF2B5EF4-FFF2-40B4-BE49-F238E27FC236}">
+                <a16:creationId xmlns:a16="http://schemas.microsoft.com/office/drawing/2014/main" id="{8045B1C3-2957-5D35-09CE-F15398346939}"/>
+              </a:ext>
+              <a:ext uri="{C183D7F6-B498-43B3-948B-1728B52AA6E4}">
+                <adec:decorative xmlns:adec="http://schemas.microsoft.com/office/drawing/2017/decorative" val="1"/>
+              </a:ext>
+            </a:extLst>
+          </p:cNvPr>
+          <p:cNvSpPr>
+            <a:spLocks noGrp="1" noRot="1" noChangeAspect="1" noMove="1" noResize="1" noEditPoints="1" noAdjustHandles="1" noChangeArrowheads="1" noChangeShapeType="1" noTextEdit="1"/>
+          </p:cNvSpPr>
+          <p:nvPr>
+            <p:extLst>
+              <p:ext uri="{386F3935-93C4-4BCD-93E2-E3B085C9AB24}">
+                <p16:designElem xmlns:p16="http://schemas.microsoft.com/office/powerpoint/2015/main" val="1"/>
+              </p:ext>
+            </p:extLst>
+          </p:nvPr>
+        </p:nvSpPr>
+        <p:spPr>
+          <a:xfrm rot="16200000">
+            <a:off x="-159565" y="2659404"/>
+            <a:ext cx="4355594" cy="4040742"/>
+          </a:xfrm>
+          <a:prstGeom prst="rect">
+            <a:avLst/>
+          </a:prstGeom>
+          <a:gradFill>
+            <a:gsLst>
+              <a:gs pos="0">
+                <a:schemeClr val="accent1">
+                  <a:alpha val="50000"/>
+                </a:schemeClr>
+              </a:gs>
+              <a:gs pos="100000">
+                <a:schemeClr val="accent1">
+                  <a:lumMod val="50000"/>
+                  <a:alpha val="0"/>
+                </a:schemeClr>
+              </a:gs>
+            </a:gsLst>
+            <a:lin ang="11400000" scaled="0"/>
+          </a:gradFill>
+          <a:ln>
+            <a:noFill/>
+          </a:ln>
+        </p:spPr>
+        <p:style>
+          <a:lnRef idx="2">
+            <a:schemeClr val="accent1">
+              <a:shade val="50000"/>
+            </a:schemeClr>
+          </a:lnRef>
+          <a:fillRef idx="1">
+            <a:schemeClr val="accent1"/>
+          </a:fillRef>
+          <a:effectRef idx="0">
+            <a:schemeClr val="accent1"/>
+          </a:effectRef>
+          <a:fontRef idx="minor">
+            <a:schemeClr val="lt1"/>
+          </a:fontRef>
+        </p:style>
+        <p:txBody>
+          <a:bodyPr rtlCol="0" anchor="ctr"/>
+          <a:lstStyle/>
+          <a:p>
+            <a:pPr algn="ctr"/>
+            <a:endParaRPr lang="en-US"/>
+          </a:p>
+        </p:txBody>
+      </p:sp>
+      <p:sp>
+        <p:nvSpPr>
+          <p:cNvPr id="27" name="Freeform: Shape 26">
+            <a:extLst>
+              <a:ext uri="{FF2B5EF4-FFF2-40B4-BE49-F238E27FC236}">
+                <a16:creationId xmlns:a16="http://schemas.microsoft.com/office/drawing/2014/main" id="{5B8ED189-DCA1-86F8-C082-19622E07E320}"/>
+              </a:ext>
+              <a:ext uri="{C183D7F6-B498-43B3-948B-1728B52AA6E4}">
+                <adec:decorative xmlns:adec="http://schemas.microsoft.com/office/drawing/2017/decorative" val="1"/>
+              </a:ext>
+            </a:extLst>
+          </p:cNvPr>
+          <p:cNvSpPr>
+            <a:spLocks noGrp="1" noRot="1" noChangeAspect="1" noMove="1" noResize="1" noEditPoints="1" noAdjustHandles="1" noChangeArrowheads="1" noChangeShapeType="1" noTextEdit="1"/>
+          </p:cNvSpPr>
+          <p:nvPr>
+            <p:extLst>
+              <p:ext uri="{386F3935-93C4-4BCD-93E2-E3B085C9AB24}">
+                <p16:designElem xmlns:p16="http://schemas.microsoft.com/office/powerpoint/2015/main" val="1"/>
+              </p:ext>
+            </p:extLst>
+          </p:nvPr>
+        </p:nvSpPr>
+        <p:spPr>
+          <a:xfrm rot="6097846">
+            <a:off x="-747355" y="1201312"/>
+            <a:ext cx="4808302" cy="4088666"/>
+          </a:xfrm>
+          <a:custGeom>
+            <a:avLst/>
+            <a:gdLst>
+              <a:gd name="connsiteX0" fmla="*/ 48844 w 4808302"/>
+              <a:gd name="connsiteY0" fmla="*/ 2888671 h 4088666"/>
+              <a:gd name="connsiteX1" fmla="*/ 0 w 4808302"/>
+              <a:gd name="connsiteY1" fmla="*/ 2404151 h 4088666"/>
+              <a:gd name="connsiteX2" fmla="*/ 2404151 w 4808302"/>
+              <a:gd name="connsiteY2" fmla="*/ 0 h 4088666"/>
+              <a:gd name="connsiteX3" fmla="*/ 4808302 w 4808302"/>
+              <a:gd name="connsiteY3" fmla="*/ 2404151 h 4088666"/>
+              <a:gd name="connsiteX4" fmla="*/ 4700216 w 4808302"/>
+              <a:gd name="connsiteY4" fmla="*/ 3119072 h 4088666"/>
+              <a:gd name="connsiteX5" fmla="*/ 4643143 w 4808302"/>
+              <a:gd name="connsiteY5" fmla="*/ 3275009 h 4088666"/>
+              <a:gd name="connsiteX6" fmla="*/ 690093 w 4808302"/>
+              <a:gd name="connsiteY6" fmla="*/ 4088666 h 4088666"/>
+              <a:gd name="connsiteX7" fmla="*/ 548991 w 4808302"/>
+              <a:gd name="connsiteY7" fmla="*/ 3933414 h 4088666"/>
+              <a:gd name="connsiteX8" fmla="*/ 48844 w 4808302"/>
+              <a:gd name="connsiteY8" fmla="*/ 2888671 h 4088666"/>
+            </a:gdLst>
+            <a:ahLst/>
+            <a:cxnLst>
+              <a:cxn ang="0">
+                <a:pos x="connsiteX0" y="connsiteY0"/>
+              </a:cxn>
+              <a:cxn ang="0">
+                <a:pos x="connsiteX1" y="connsiteY1"/>
+              </a:cxn>
+              <a:cxn ang="0">
+                <a:pos x="connsiteX2" y="connsiteY2"/>
+              </a:cxn>
+              <a:cxn ang="0">
+                <a:pos x="connsiteX3" y="connsiteY3"/>
+              </a:cxn>
+              <a:cxn ang="0">
+                <a:pos x="connsiteX4" y="connsiteY4"/>
+              </a:cxn>
+              <a:cxn ang="0">
+                <a:pos x="connsiteX5" y="connsiteY5"/>
+              </a:cxn>
+              <a:cxn ang="0">
+                <a:pos x="connsiteX6" y="connsiteY6"/>
+              </a:cxn>
+              <a:cxn ang="0">
+                <a:pos x="connsiteX7" y="connsiteY7"/>
+              </a:cxn>
+              <a:cxn ang="0">
+                <a:pos x="connsiteX8" y="connsiteY8"/>
+              </a:cxn>
+            </a:cxnLst>
+            <a:rect l="l" t="t" r="r" b="b"/>
+            <a:pathLst>
+              <a:path w="4808302" h="4088666">
+                <a:moveTo>
+                  <a:pt x="48844" y="2888671"/>
+                </a:moveTo>
+                <a:cubicBezTo>
+                  <a:pt x="16818" y="2732167"/>
+                  <a:pt x="0" y="2570123"/>
+                  <a:pt x="0" y="2404151"/>
+                </a:cubicBezTo>
+                <a:cubicBezTo>
+                  <a:pt x="0" y="1076375"/>
+                  <a:pt x="1076375" y="0"/>
+                  <a:pt x="2404151" y="0"/>
+                </a:cubicBezTo>
+                <a:cubicBezTo>
+                  <a:pt x="3731927" y="0"/>
+                  <a:pt x="4808302" y="1076375"/>
+                  <a:pt x="4808302" y="2404151"/>
+                </a:cubicBezTo>
+                <a:cubicBezTo>
+                  <a:pt x="4808302" y="2653109"/>
+                  <a:pt x="4770461" y="2893229"/>
+                  <a:pt x="4700216" y="3119072"/>
+                </a:cubicBezTo>
+                <a:lnTo>
+                  <a:pt x="4643143" y="3275009"/>
+                </a:lnTo>
+                <a:lnTo>
+                  <a:pt x="690093" y="4088666"/>
+                </a:lnTo>
+                <a:lnTo>
+                  <a:pt x="548991" y="3933414"/>
+                </a:lnTo>
+                <a:cubicBezTo>
+                  <a:pt x="304015" y="3636572"/>
+                  <a:pt x="128908" y="3279932"/>
+                  <a:pt x="48844" y="2888671"/>
+                </a:cubicBezTo>
+                <a:close/>
+              </a:path>
+            </a:pathLst>
+          </a:custGeom>
+          <a:gradFill>
+            <a:gsLst>
+              <a:gs pos="39000">
+                <a:schemeClr val="accent1">
+                  <a:lumMod val="60000"/>
+                  <a:lumOff val="40000"/>
+                  <a:alpha val="0"/>
+                </a:schemeClr>
+              </a:gs>
+              <a:gs pos="100000">
+                <a:schemeClr val="accent1">
+                  <a:lumMod val="75000"/>
+                  <a:alpha val="26000"/>
+                </a:schemeClr>
+              </a:gs>
+            </a:gsLst>
+            <a:lin ang="16800000" scaled="0"/>
+          </a:gradFill>
+          <a:ln>
+            <a:noFill/>
+          </a:ln>
+        </p:spPr>
+        <p:style>
+          <a:lnRef idx="2">
+            <a:schemeClr val="accent1">
+              <a:shade val="50000"/>
+            </a:schemeClr>
+          </a:lnRef>
+          <a:fillRef idx="1">
+            <a:schemeClr val="accent1"/>
+          </a:fillRef>
+          <a:effectRef idx="0">
+            <a:schemeClr val="accent1"/>
+          </a:effectRef>
+          <a:fontRef idx="minor">
+            <a:schemeClr val="lt1"/>
+          </a:fontRef>
+        </p:style>
+        <p:txBody>
+          <a:bodyPr wrap="square" rtlCol="0" anchor="ctr">
+            <a:noAutofit/>
+          </a:bodyPr>
+          <a:lstStyle/>
+          <a:p>
+            <a:pPr algn="ctr"/>
+            <a:endParaRPr lang="en-US" dirty="0"/>
+          </a:p>
+        </p:txBody>
+      </p:sp>
+      <p:sp>
+        <p:nvSpPr>
+          <p:cNvPr id="2" name="Title 1">
+            <a:extLst>
+              <a:ext uri="{FF2B5EF4-FFF2-40B4-BE49-F238E27FC236}">
+                <a16:creationId xmlns:a16="http://schemas.microsoft.com/office/drawing/2014/main" id="{0FB54EAE-7F2C-CB0F-6490-86F1CCFD7DC6}"/>
+              </a:ext>
+            </a:extLst>
+          </p:cNvPr>
+          <p:cNvSpPr>
+            <a:spLocks noGrp="1"/>
+          </p:cNvSpPr>
+          <p:nvPr>
+            <p:ph type="title"/>
+          </p:nvPr>
+        </p:nvSpPr>
+        <p:spPr>
+          <a:xfrm>
+            <a:off x="534473" y="2950387"/>
+            <a:ext cx="3052293" cy="3531403"/>
+          </a:xfrm>
+        </p:spPr>
+        <p:txBody>
+          <a:bodyPr vert="horz" lIns="91440" tIns="45720" rIns="91440" bIns="45720" rtlCol="0" anchor="t">
+            <a:normAutofit/>
+          </a:bodyPr>
+          <a:lstStyle/>
+          <a:p>
+            <a:pPr algn="r"/>
+            <a:r>
+              <a:rPr lang="en-US" sz="4000" dirty="0">
+                <a:solidFill>
+                  <a:srgbClr val="FFFFFF"/>
+                </a:solidFill>
+              </a:rPr>
+              <a:t>Main Game Loop Cont.</a:t>
+            </a:r>
+          </a:p>
+        </p:txBody>
+      </p:sp>
+      <p:pic>
+        <p:nvPicPr>
+          <p:cNvPr id="6" name="Content Placeholder 5">
+            <a:extLst>
+              <a:ext uri="{FF2B5EF4-FFF2-40B4-BE49-F238E27FC236}">
+                <a16:creationId xmlns:a16="http://schemas.microsoft.com/office/drawing/2014/main" id="{3A57F4BD-C261-8168-0FE4-3AA2CFA7946F}"/>
+              </a:ext>
+            </a:extLst>
+          </p:cNvPr>
+          <p:cNvPicPr>
+            <a:picLocks noGrp="1" noChangeAspect="1"/>
+          </p:cNvPicPr>
+          <p:nvPr>
+            <p:ph idx="1"/>
+          </p:nvPr>
+        </p:nvPicPr>
+        <p:blipFill>
+          <a:blip r:embed="rId3"/>
+          <a:stretch>
+            <a:fillRect/>
+          </a:stretch>
+        </p:blipFill>
+        <p:spPr>
+          <a:xfrm>
+            <a:off x="4102522" y="531728"/>
+            <a:ext cx="8089478" cy="5489760"/>
+          </a:xfrm>
+          <a:prstGeom prst="rect">
+            <a:avLst/>
+          </a:prstGeom>
+        </p:spPr>
+      </p:pic>
+    </p:spTree>
+    <p:extLst>
+      <p:ext uri="{BB962C8B-B14F-4D97-AF65-F5344CB8AC3E}">
+        <p14:creationId xmlns:p14="http://schemas.microsoft.com/office/powerpoint/2010/main" val="1147805342"/>
+      </p:ext>
+    </p:extLst>
+  </p:cSld>
+  <p:clrMapOvr>
+    <a:masterClrMapping/>
+  </p:clrMapOvr>
+</p:sld>
+</file>
+
+<file path=ppt/slides/slide8.xml><?xml version="1.0" encoding="utf-8"?>
+<p:sld xmlns:a="http://schemas.openxmlformats.org/drawingml/2006/main" xmlns:r="http://schemas.openxmlformats.org/officeDocument/2006/relationships" xmlns:p="http://schemas.openxmlformats.org/presentationml/2006/main">
+  <p:cSld>
+    <p:bg>
+      <p:bgPr>
+        <a:solidFill>
+          <a:schemeClr val="bg1"/>
+        </a:solidFill>
+        <a:effectLst/>
+      </p:bgPr>
+    </p:bg>
+    <p:spTree>
+      <p:nvGrpSpPr>
+        <p:cNvPr id="1" name="">
+          <a:extLst>
+            <a:ext uri="{FF2B5EF4-FFF2-40B4-BE49-F238E27FC236}">
+              <a16:creationId xmlns:a16="http://schemas.microsoft.com/office/drawing/2014/main" id="{86E930D7-D287-DE8B-CFDE-DC2061F6034C}"/>
+            </a:ext>
+          </a:extLst>
+        </p:cNvPr>
+        <p:cNvGrpSpPr/>
+        <p:nvPr/>
+      </p:nvGrpSpPr>
+      <p:grpSpPr>
+        <a:xfrm>
+          <a:off x="0" y="0"/>
+          <a:ext cx="0" cy="0"/>
+          <a:chOff x="0" y="0"/>
+          <a:chExt cx="0" cy="0"/>
+        </a:xfrm>
+      </p:grpSpPr>
+      <p:sp useBgFill="1">
+        <p:nvSpPr>
+          <p:cNvPr id="18" name="Rectangle 17">
+            <a:extLst>
+              <a:ext uri="{FF2B5EF4-FFF2-40B4-BE49-F238E27FC236}">
+                <a16:creationId xmlns:a16="http://schemas.microsoft.com/office/drawing/2014/main" id="{0D8D8114-0DD2-2D75-6601-909A6E3CBE6C}"/>
+              </a:ext>
+              <a:ext uri="{C183D7F6-B498-43B3-948B-1728B52AA6E4}">
+                <adec:decorative xmlns:adec="http://schemas.microsoft.com/office/drawing/2017/decorative" val="1"/>
+              </a:ext>
+            </a:extLst>
+          </p:cNvPr>
+          <p:cNvSpPr>
+            <a:spLocks noGrp="1" noRot="1" noChangeAspect="1" noMove="1" noResize="1" noEditPoints="1" noAdjustHandles="1" noChangeArrowheads="1" noChangeShapeType="1" noTextEdit="1"/>
+          </p:cNvSpPr>
+          <p:nvPr>
+            <p:extLst>
+              <p:ext uri="{386F3935-93C4-4BCD-93E2-E3B085C9AB24}">
+                <p16:designElem xmlns:p16="http://schemas.microsoft.com/office/powerpoint/2015/main" val="1"/>
+              </p:ext>
+            </p:extLst>
+          </p:nvPr>
+        </p:nvSpPr>
+        <p:spPr>
+          <a:xfrm>
+            <a:off x="0" y="0"/>
+            <a:ext cx="12192000" cy="6858000"/>
+          </a:xfrm>
+          <a:prstGeom prst="rect">
+            <a:avLst/>
+          </a:prstGeom>
+          <a:ln w="12700" cap="flat" cmpd="sng" algn="ctr">
+            <a:noFill/>
+            <a:prstDash val="solid"/>
+            <a:miter lim="800000"/>
+          </a:ln>
+          <a:effectLst/>
+          <a:extLst>
+            <a:ext uri="{91240B29-F687-4F45-9708-019B960494DF}">
+              <a14:hiddenLine xmlns:a14="http://schemas.microsoft.com/office/drawing/2010/main" w="12700" cap="flat" cmpd="sng" algn="ctr">
+                <a:solidFill>
+                  <a:schemeClr val="accent1">
+                    <a:shade val="50000"/>
+                  </a:schemeClr>
+                </a:solidFill>
+                <a:prstDash val="solid"/>
+                <a:miter lim="800000"/>
+              </a14:hiddenLine>
+            </a:ext>
+          </a:extLst>
+        </p:spPr>
+        <p:style>
+          <a:lnRef idx="2">
+            <a:schemeClr val="accent1">
+              <a:shade val="50000"/>
+            </a:schemeClr>
+          </a:lnRef>
+          <a:fillRef idx="1">
+            <a:schemeClr val="accent1"/>
+          </a:fillRef>
+          <a:effectRef idx="0">
+            <a:schemeClr val="accent1"/>
+          </a:effectRef>
+          <a:fontRef idx="minor">
+            <a:schemeClr val="lt1"/>
+          </a:fontRef>
+        </p:style>
+        <p:txBody>
+          <a:bodyPr rtlCol="0" anchor="ctr"/>
+          <a:lstStyle/>
+          <a:p>
+            <a:pPr algn="ctr"/>
+            <a:endParaRPr lang="en-US" sz="2000"/>
+          </a:p>
+        </p:txBody>
+      </p:sp>
+      <p:sp>
+        <p:nvSpPr>
+          <p:cNvPr id="20" name="Rectangle 19">
+            <a:extLst>
+              <a:ext uri="{FF2B5EF4-FFF2-40B4-BE49-F238E27FC236}">
+                <a16:creationId xmlns:a16="http://schemas.microsoft.com/office/drawing/2014/main" id="{F34B543B-BBAE-A619-B180-72D184562F0C}"/>
+              </a:ext>
+              <a:ext uri="{C183D7F6-B498-43B3-948B-1728B52AA6E4}">
+                <adec:decorative xmlns:adec="http://schemas.microsoft.com/office/drawing/2017/decorative" val="1"/>
+              </a:ext>
+            </a:extLst>
+          </p:cNvPr>
+          <p:cNvSpPr>
+            <a:spLocks noGrp="1" noRot="1" noChangeAspect="1" noMove="1" noResize="1" noEditPoints="1" noAdjustHandles="1" noChangeArrowheads="1" noChangeShapeType="1" noTextEdit="1"/>
+          </p:cNvSpPr>
+          <p:nvPr>
+            <p:extLst>
+              <p:ext uri="{386F3935-93C4-4BCD-93E2-E3B085C9AB24}">
+                <p16:designElem xmlns:p16="http://schemas.microsoft.com/office/powerpoint/2015/main" val="1"/>
+              </p:ext>
+            </p:extLst>
+          </p:nvPr>
+        </p:nvSpPr>
+        <p:spPr>
+          <a:xfrm flipH="1">
+            <a:off x="2" y="492"/>
+            <a:ext cx="12191998" cy="1575955"/>
+          </a:xfrm>
+          <a:prstGeom prst="rect">
+            <a:avLst/>
+          </a:prstGeom>
+          <a:gradFill>
+            <a:gsLst>
+              <a:gs pos="0">
+                <a:schemeClr val="accent1">
+                  <a:lumMod val="50000"/>
+                </a:schemeClr>
+              </a:gs>
+              <a:gs pos="100000">
+                <a:schemeClr val="accent1">
+                  <a:lumMod val="75000"/>
+                </a:schemeClr>
+              </a:gs>
+            </a:gsLst>
+            <a:lin ang="8400000" scaled="0"/>
+          </a:gradFill>
+          <a:ln>
+            <a:noFill/>
+          </a:ln>
+        </p:spPr>
+        <p:style>
+          <a:lnRef idx="2">
+            <a:schemeClr val="accent1">
+              <a:shade val="50000"/>
+            </a:schemeClr>
+          </a:lnRef>
+          <a:fillRef idx="1">
+            <a:schemeClr val="accent1"/>
+          </a:fillRef>
+          <a:effectRef idx="0">
+            <a:schemeClr val="accent1"/>
+          </a:effectRef>
+          <a:fontRef idx="minor">
+            <a:schemeClr val="lt1"/>
+          </a:fontRef>
+        </p:style>
+        <p:txBody>
+          <a:bodyPr rtlCol="0" anchor="ctr"/>
+          <a:lstStyle/>
+          <a:p>
+            <a:pPr algn="ctr"/>
+            <a:endParaRPr lang="en-US"/>
+          </a:p>
+        </p:txBody>
+      </p:sp>
+      <p:sp>
+        <p:nvSpPr>
+          <p:cNvPr id="22" name="Rectangle 21">
+            <a:extLst>
+              <a:ext uri="{FF2B5EF4-FFF2-40B4-BE49-F238E27FC236}">
+                <a16:creationId xmlns:a16="http://schemas.microsoft.com/office/drawing/2014/main" id="{B6484AC2-D4F2-432A-04E3-DE136140EFA9}"/>
+              </a:ext>
+              <a:ext uri="{C183D7F6-B498-43B3-948B-1728B52AA6E4}">
+                <adec:decorative xmlns:adec="http://schemas.microsoft.com/office/drawing/2017/decorative" val="1"/>
+              </a:ext>
+            </a:extLst>
+          </p:cNvPr>
+          <p:cNvSpPr>
+            <a:spLocks noGrp="1" noRot="1" noChangeAspect="1" noMove="1" noResize="1" noEditPoints="1" noAdjustHandles="1" noChangeArrowheads="1" noChangeShapeType="1" noTextEdit="1"/>
+          </p:cNvSpPr>
+          <p:nvPr>
+            <p:extLst>
+              <p:ext uri="{386F3935-93C4-4BCD-93E2-E3B085C9AB24}">
+                <p16:designElem xmlns:p16="http://schemas.microsoft.com/office/powerpoint/2015/main" val="1"/>
+              </p:ext>
+            </p:extLst>
+          </p:nvPr>
+        </p:nvSpPr>
+        <p:spPr>
+          <a:xfrm rot="10800000" flipH="1">
+            <a:off x="8128857" y="35"/>
+            <a:ext cx="4063143" cy="1576412"/>
+          </a:xfrm>
+          <a:prstGeom prst="rect">
+            <a:avLst/>
+          </a:prstGeom>
+          <a:gradFill>
+            <a:gsLst>
+              <a:gs pos="19000">
+                <a:schemeClr val="accent1">
+                  <a:lumMod val="50000"/>
+                  <a:alpha val="68000"/>
+                </a:schemeClr>
+              </a:gs>
+              <a:gs pos="100000">
+                <a:schemeClr val="accent1">
+                  <a:alpha val="79000"/>
+                </a:schemeClr>
+              </a:gs>
+            </a:gsLst>
+            <a:lin ang="19200000" scaled="0"/>
+          </a:gradFill>
+          <a:ln>
+            <a:noFill/>
+          </a:ln>
+        </p:spPr>
+        <p:style>
+          <a:lnRef idx="2">
+            <a:schemeClr val="accent1">
+              <a:shade val="50000"/>
+            </a:schemeClr>
+          </a:lnRef>
+          <a:fillRef idx="1">
+            <a:schemeClr val="accent1"/>
+          </a:fillRef>
+          <a:effectRef idx="0">
+            <a:schemeClr val="accent1"/>
+          </a:effectRef>
+          <a:fontRef idx="minor">
+            <a:schemeClr val="lt1"/>
+          </a:fontRef>
+        </p:style>
+        <p:txBody>
+          <a:bodyPr rtlCol="0" anchor="ctr"/>
+          <a:lstStyle/>
+          <a:p>
+            <a:pPr algn="ctr"/>
+            <a:endParaRPr lang="en-US"/>
+          </a:p>
+        </p:txBody>
+      </p:sp>
+      <p:sp>
+        <p:nvSpPr>
+          <p:cNvPr id="24" name="Rectangle 23">
+            <a:extLst>
+              <a:ext uri="{FF2B5EF4-FFF2-40B4-BE49-F238E27FC236}">
+                <a16:creationId xmlns:a16="http://schemas.microsoft.com/office/drawing/2014/main" id="{84941839-DAFA-5C2A-2C19-A142CE1EAB98}"/>
+              </a:ext>
+              <a:ext uri="{C183D7F6-B498-43B3-948B-1728B52AA6E4}">
+                <adec:decorative xmlns:adec="http://schemas.microsoft.com/office/drawing/2017/decorative" val="1"/>
+              </a:ext>
+            </a:extLst>
+          </p:cNvPr>
+          <p:cNvSpPr>
+            <a:spLocks noGrp="1" noRot="1" noChangeAspect="1" noMove="1" noResize="1" noEditPoints="1" noAdjustHandles="1" noChangeArrowheads="1" noChangeShapeType="1" noTextEdit="1"/>
+          </p:cNvSpPr>
+          <p:nvPr>
+            <p:extLst>
+              <p:ext uri="{386F3935-93C4-4BCD-93E2-E3B085C9AB24}">
+                <p16:designElem xmlns:p16="http://schemas.microsoft.com/office/powerpoint/2015/main" val="1"/>
+              </p:ext>
+            </p:extLst>
+          </p:nvPr>
+        </p:nvSpPr>
+        <p:spPr>
+          <a:xfrm rot="5400000">
+            <a:off x="5307778" y="-5307777"/>
+            <a:ext cx="1576446" cy="12192001"/>
+          </a:xfrm>
+          <a:prstGeom prst="rect">
+            <a:avLst/>
+          </a:prstGeom>
+          <a:gradFill>
+            <a:gsLst>
+              <a:gs pos="16000">
+                <a:srgbClr val="000000">
+                  <a:alpha val="0"/>
+                </a:srgbClr>
+              </a:gs>
+              <a:gs pos="99000">
+                <a:srgbClr val="000000">
+                  <a:alpha val="87000"/>
+                </a:srgbClr>
+              </a:gs>
+            </a:gsLst>
+            <a:lin ang="11400000" scaled="0"/>
+          </a:gradFill>
+          <a:ln>
+            <a:noFill/>
+          </a:ln>
+        </p:spPr>
+        <p:style>
+          <a:lnRef idx="2">
+            <a:schemeClr val="accent1">
+              <a:shade val="50000"/>
+            </a:schemeClr>
+          </a:lnRef>
+          <a:fillRef idx="1">
+            <a:schemeClr val="accent1"/>
+          </a:fillRef>
+          <a:effectRef idx="0">
+            <a:schemeClr val="accent1"/>
+          </a:effectRef>
+          <a:fontRef idx="minor">
+            <a:schemeClr val="lt1"/>
+          </a:fontRef>
+        </p:style>
+        <p:txBody>
+          <a:bodyPr rtlCol="0" anchor="ctr"/>
+          <a:lstStyle/>
+          <a:p>
+            <a:pPr algn="ctr"/>
+            <a:endParaRPr lang="en-US" dirty="0"/>
+          </a:p>
+        </p:txBody>
+      </p:sp>
+      <p:sp>
+        <p:nvSpPr>
+          <p:cNvPr id="26" name="Rectangle 25">
+            <a:extLst>
+              <a:ext uri="{FF2B5EF4-FFF2-40B4-BE49-F238E27FC236}">
+                <a16:creationId xmlns:a16="http://schemas.microsoft.com/office/drawing/2014/main" id="{2BA18926-AE65-F181-17DA-97DDF0D00EA2}"/>
+              </a:ext>
+              <a:ext uri="{C183D7F6-B498-43B3-948B-1728B52AA6E4}">
+                <adec:decorative xmlns:adec="http://schemas.microsoft.com/office/drawing/2017/decorative" val="1"/>
+              </a:ext>
+            </a:extLst>
+          </p:cNvPr>
+          <p:cNvSpPr>
+            <a:spLocks noGrp="1" noRot="1" noChangeAspect="1" noMove="1" noResize="1" noEditPoints="1" noAdjustHandles="1" noChangeArrowheads="1" noChangeShapeType="1" noTextEdit="1"/>
+          </p:cNvSpPr>
+          <p:nvPr>
+            <p:extLst>
+              <p:ext uri="{386F3935-93C4-4BCD-93E2-E3B085C9AB24}">
+                <p16:designElem xmlns:p16="http://schemas.microsoft.com/office/powerpoint/2015/main" val="1"/>
+              </p:ext>
+            </p:extLst>
+          </p:nvPr>
+        </p:nvSpPr>
+        <p:spPr>
+          <a:xfrm>
+            <a:off x="3825434" y="986"/>
+            <a:ext cx="4303422" cy="1575461"/>
+          </a:xfrm>
+          <a:prstGeom prst="rect">
+            <a:avLst/>
+          </a:prstGeom>
+          <a:gradFill>
+            <a:gsLst>
+              <a:gs pos="0">
+                <a:schemeClr val="accent1">
+                  <a:alpha val="17000"/>
+                </a:schemeClr>
+              </a:gs>
+              <a:gs pos="74000">
+                <a:schemeClr val="accent1">
+                  <a:lumMod val="50000"/>
+                  <a:alpha val="0"/>
+                </a:schemeClr>
+              </a:gs>
+            </a:gsLst>
+            <a:lin ang="14400000" scaled="0"/>
+          </a:gradFill>
+          <a:ln>
+            <a:noFill/>
+          </a:ln>
+        </p:spPr>
+        <p:style>
+          <a:lnRef idx="2">
+            <a:schemeClr val="accent1">
+              <a:shade val="50000"/>
+            </a:schemeClr>
+          </a:lnRef>
+          <a:fillRef idx="1">
+            <a:schemeClr val="accent1"/>
+          </a:fillRef>
+          <a:effectRef idx="0">
+            <a:schemeClr val="accent1"/>
+          </a:effectRef>
+          <a:fontRef idx="minor">
+            <a:schemeClr val="lt1"/>
+          </a:fontRef>
+        </p:style>
+        <p:txBody>
+          <a:bodyPr rtlCol="0" anchor="ctr"/>
+          <a:lstStyle/>
+          <a:p>
+            <a:pPr algn="ctr"/>
+            <a:endParaRPr lang="en-US"/>
+          </a:p>
+        </p:txBody>
+      </p:sp>
+      <p:sp>
+        <p:nvSpPr>
+          <p:cNvPr id="2" name="Title 1">
+            <a:extLst>
+              <a:ext uri="{FF2B5EF4-FFF2-40B4-BE49-F238E27FC236}">
+                <a16:creationId xmlns:a16="http://schemas.microsoft.com/office/drawing/2014/main" id="{038C0DA2-A3D4-0240-AF32-99CFBACE3BD3}"/>
+              </a:ext>
+            </a:extLst>
+          </p:cNvPr>
+          <p:cNvSpPr>
+            <a:spLocks noGrp="1"/>
+          </p:cNvSpPr>
+          <p:nvPr>
+            <p:ph type="title"/>
+          </p:nvPr>
+        </p:nvSpPr>
+        <p:spPr>
+          <a:xfrm>
+            <a:off x="699714" y="353160"/>
+            <a:ext cx="7091300" cy="898581"/>
+          </a:xfrm>
+        </p:spPr>
+        <p:txBody>
+          <a:bodyPr vert="horz" lIns="91440" tIns="45720" rIns="91440" bIns="45720" rtlCol="0" anchor="ctr">
+            <a:normAutofit/>
+          </a:bodyPr>
+          <a:lstStyle/>
+          <a:p>
+            <a:r>
+              <a:rPr lang="en-US" sz="4000" dirty="0">
+                <a:solidFill>
+                  <a:srgbClr val="FFFFFF"/>
+                </a:solidFill>
+              </a:rPr>
+              <a:t>Main Menu Code</a:t>
+            </a:r>
+          </a:p>
+        </p:txBody>
+      </p:sp>
+      <p:pic>
+        <p:nvPicPr>
+          <p:cNvPr id="7" name="Content Placeholder 6">
+            <a:extLst>
+              <a:ext uri="{FF2B5EF4-FFF2-40B4-BE49-F238E27FC236}">
+                <a16:creationId xmlns:a16="http://schemas.microsoft.com/office/drawing/2014/main" id="{499A299E-7CA4-9459-F65B-024699032BA5}"/>
+              </a:ext>
+            </a:extLst>
+          </p:cNvPr>
+          <p:cNvPicPr>
+            <a:picLocks noGrp="1" noChangeAspect="1"/>
+          </p:cNvPicPr>
+          <p:nvPr>
+            <p:ph idx="1"/>
+          </p:nvPr>
+        </p:nvPicPr>
+        <p:blipFill>
+          <a:blip r:embed="rId2"/>
+          <a:stretch>
+            <a:fillRect/>
+          </a:stretch>
+        </p:blipFill>
+        <p:spPr>
+          <a:xfrm>
+            <a:off x="1488028" y="1603915"/>
+            <a:ext cx="9215943" cy="5245438"/>
+          </a:xfrm>
+          <a:prstGeom prst="rect">
+            <a:avLst/>
+          </a:prstGeom>
+        </p:spPr>
+      </p:pic>
+    </p:spTree>
+    <p:extLst>
+      <p:ext uri="{BB962C8B-B14F-4D97-AF65-F5344CB8AC3E}">
+        <p14:creationId xmlns:p14="http://schemas.microsoft.com/office/powerpoint/2010/main" val="439909802"/>
       </p:ext>
     </p:extLst>
   </p:cSld>
@@ -7994,4 +9535,319 @@
     </a:ext>
   </a:extLst>
 </a:theme>
+</file>
+
+<file path=ppt/theme/theme2.xml><?xml version="1.0" encoding="utf-8"?>
+<a:theme xmlns:a="http://schemas.openxmlformats.org/drawingml/2006/main" name="Office Theme">
+  <a:themeElements>
+    <a:clrScheme name="Office">
+      <a:dk1>
+        <a:sysClr val="windowText" lastClr="000000"/>
+      </a:dk1>
+      <a:lt1>
+        <a:sysClr val="window" lastClr="FFFFFF"/>
+      </a:lt1>
+      <a:dk2>
+        <a:srgbClr val="0E2841"/>
+      </a:dk2>
+      <a:lt2>
+        <a:srgbClr val="E8E8E8"/>
+      </a:lt2>
+      <a:accent1>
+        <a:srgbClr val="156082"/>
+      </a:accent1>
+      <a:accent2>
+        <a:srgbClr val="E97132"/>
+      </a:accent2>
+      <a:accent3>
+        <a:srgbClr val="196B24"/>
+      </a:accent3>
+      <a:accent4>
+        <a:srgbClr val="0F9ED5"/>
+      </a:accent4>
+      <a:accent5>
+        <a:srgbClr val="A02B93"/>
+      </a:accent5>
+      <a:accent6>
+        <a:srgbClr val="4EA72E"/>
+      </a:accent6>
+      <a:hlink>
+        <a:srgbClr val="467886"/>
+      </a:hlink>
+      <a:folHlink>
+        <a:srgbClr val="96607D"/>
+      </a:folHlink>
+    </a:clrScheme>
+    <a:fontScheme name="Office">
+      <a:majorFont>
+        <a:latin typeface="Aptos Display" panose="02110004020202020204"/>
+        <a:ea typeface=""/>
+        <a:cs typeface=""/>
+        <a:font script="Jpan" typeface="游ゴシック Light"/>
+        <a:font script="Hang" typeface="맑은 고딕"/>
+        <a:font script="Hans" typeface="等线 Light"/>
+        <a:font script="Hant" typeface="新細明體"/>
+        <a:font script="Arab" typeface="Times New Roman"/>
+        <a:font script="Hebr" typeface="Times New Roman"/>
+        <a:font script="Thai" typeface="Angsana New"/>
+        <a:font script="Ethi" typeface="Nyala"/>
+        <a:font script="Beng" typeface="Vrinda"/>
+        <a:font script="Gujr" typeface="Shruti"/>
+        <a:font script="Khmr" typeface="MoolBoran"/>
+        <a:font script="Knda" typeface="Tunga"/>
+        <a:font script="Guru" typeface="Raavi"/>
+        <a:font script="Cans" typeface="Euphemia"/>
+        <a:font script="Cher" typeface="Plantagenet Cherokee"/>
+        <a:font script="Yiii" typeface="Microsoft Yi Baiti"/>
+        <a:font script="Tibt" typeface="Microsoft Himalaya"/>
+        <a:font script="Thaa" typeface="MV Boli"/>
+        <a:font script="Deva" typeface="Mangal"/>
+        <a:font script="Telu" typeface="Gautami"/>
+        <a:font script="Taml" typeface="Latha"/>
+        <a:font script="Syrc" typeface="Estrangelo Edessa"/>
+        <a:font script="Orya" typeface="Kalinga"/>
+        <a:font script="Mlym" typeface="Kartika"/>
+        <a:font script="Laoo" typeface="DokChampa"/>
+        <a:font script="Sinh" typeface="Iskoola Pota"/>
+        <a:font script="Mong" typeface="Mongolian Baiti"/>
+        <a:font script="Viet" typeface="Times New Roman"/>
+        <a:font script="Uigh" typeface="Microsoft Uighur"/>
+        <a:font script="Geor" typeface="Sylfaen"/>
+        <a:font script="Armn" typeface="Arial"/>
+        <a:font script="Bugi" typeface="Leelawadee UI"/>
+        <a:font script="Bopo" typeface="Microsoft JhengHei"/>
+        <a:font script="Java" typeface="Javanese Text"/>
+        <a:font script="Lisu" typeface="Segoe UI"/>
+        <a:font script="Mymr" typeface="Myanmar Text"/>
+        <a:font script="Nkoo" typeface="Ebrima"/>
+        <a:font script="Olck" typeface="Nirmala UI"/>
+        <a:font script="Osma" typeface="Ebrima"/>
+        <a:font script="Phag" typeface="Phagspa"/>
+        <a:font script="Syrn" typeface="Estrangelo Edessa"/>
+        <a:font script="Syrj" typeface="Estrangelo Edessa"/>
+        <a:font script="Syre" typeface="Estrangelo Edessa"/>
+        <a:font script="Sora" typeface="Nirmala UI"/>
+        <a:font script="Tale" typeface="Microsoft Tai Le"/>
+        <a:font script="Talu" typeface="Microsoft New Tai Lue"/>
+        <a:font script="Tfng" typeface="Ebrima"/>
+      </a:majorFont>
+      <a:minorFont>
+        <a:latin typeface="Aptos" panose="02110004020202020204"/>
+        <a:ea typeface=""/>
+        <a:cs typeface=""/>
+        <a:font script="Jpan" typeface="游ゴシック"/>
+        <a:font script="Hang" typeface="맑은 고딕"/>
+        <a:font script="Hans" typeface="等线"/>
+        <a:font script="Hant" typeface="新細明體"/>
+        <a:font script="Arab" typeface="Arial"/>
+        <a:font script="Hebr" typeface="Arial"/>
+        <a:font script="Thai" typeface="Cordia New"/>
+        <a:font script="Ethi" typeface="Nyala"/>
+        <a:font script="Beng" typeface="Vrinda"/>
+        <a:font script="Gujr" typeface="Shruti"/>
+        <a:font script="Khmr" typeface="DaunPenh"/>
+        <a:font script="Knda" typeface="Tunga"/>
+        <a:font script="Guru" typeface="Raavi"/>
+        <a:font script="Cans" typeface="Euphemia"/>
+        <a:font script="Cher" typeface="Plantagenet Cherokee"/>
+        <a:font script="Yiii" typeface="Microsoft Yi Baiti"/>
+        <a:font script="Tibt" typeface="Microsoft Himalaya"/>
+        <a:font script="Thaa" typeface="MV Boli"/>
+        <a:font script="Deva" typeface="Mangal"/>
+        <a:font script="Telu" typeface="Gautami"/>
+        <a:font script="Taml" typeface="Latha"/>
+        <a:font script="Syrc" typeface="Estrangelo Edessa"/>
+        <a:font script="Orya" typeface="Kalinga"/>
+        <a:font script="Mlym" typeface="Kartika"/>
+        <a:font script="Laoo" typeface="DokChampa"/>
+        <a:font script="Sinh" typeface="Iskoola Pota"/>
+        <a:font script="Mong" typeface="Mongolian Baiti"/>
+        <a:font script="Viet" typeface="Arial"/>
+        <a:font script="Uigh" typeface="Microsoft Uighur"/>
+        <a:font script="Geor" typeface="Sylfaen"/>
+        <a:font script="Armn" typeface="Arial"/>
+        <a:font script="Bugi" typeface="Leelawadee UI"/>
+        <a:font script="Bopo" typeface="Microsoft JhengHei"/>
+        <a:font script="Java" typeface="Javanese Text"/>
+        <a:font script="Lisu" typeface="Segoe UI"/>
+        <a:font script="Mymr" typeface="Myanmar Text"/>
+        <a:font script="Nkoo" typeface="Ebrima"/>
+        <a:font script="Olck" typeface="Nirmala UI"/>
+        <a:font script="Osma" typeface="Ebrima"/>
+        <a:font script="Phag" typeface="Phagspa"/>
+        <a:font script="Syrn" typeface="Estrangelo Edessa"/>
+        <a:font script="Syrj" typeface="Estrangelo Edessa"/>
+        <a:font script="Syre" typeface="Estrangelo Edessa"/>
+        <a:font script="Sora" typeface="Nirmala UI"/>
+        <a:font script="Tale" typeface="Microsoft Tai Le"/>
+        <a:font script="Talu" typeface="Microsoft New Tai Lue"/>
+        <a:font script="Tfng" typeface="Ebrima"/>
+      </a:minorFont>
+    </a:fontScheme>
+    <a:fmtScheme name="Office">
+      <a:fillStyleLst>
+        <a:solidFill>
+          <a:schemeClr val="phClr"/>
+        </a:solidFill>
+        <a:gradFill rotWithShape="1">
+          <a:gsLst>
+            <a:gs pos="0">
+              <a:schemeClr val="phClr">
+                <a:lumMod val="110000"/>
+                <a:satMod val="105000"/>
+                <a:tint val="67000"/>
+              </a:schemeClr>
+            </a:gs>
+            <a:gs pos="50000">
+              <a:schemeClr val="phClr">
+                <a:lumMod val="105000"/>
+                <a:satMod val="103000"/>
+                <a:tint val="73000"/>
+              </a:schemeClr>
+            </a:gs>
+            <a:gs pos="100000">
+              <a:schemeClr val="phClr">
+                <a:lumMod val="105000"/>
+                <a:satMod val="109000"/>
+                <a:tint val="81000"/>
+              </a:schemeClr>
+            </a:gs>
+          </a:gsLst>
+          <a:lin ang="5400000" scaled="0"/>
+        </a:gradFill>
+        <a:gradFill rotWithShape="1">
+          <a:gsLst>
+            <a:gs pos="0">
+              <a:schemeClr val="phClr">
+                <a:satMod val="103000"/>
+                <a:lumMod val="102000"/>
+                <a:tint val="94000"/>
+              </a:schemeClr>
+            </a:gs>
+            <a:gs pos="50000">
+              <a:schemeClr val="phClr">
+                <a:satMod val="110000"/>
+                <a:lumMod val="100000"/>
+                <a:shade val="100000"/>
+              </a:schemeClr>
+            </a:gs>
+            <a:gs pos="100000">
+              <a:schemeClr val="phClr">
+                <a:lumMod val="99000"/>
+                <a:satMod val="120000"/>
+                <a:shade val="78000"/>
+              </a:schemeClr>
+            </a:gs>
+          </a:gsLst>
+          <a:lin ang="5400000" scaled="0"/>
+        </a:gradFill>
+      </a:fillStyleLst>
+      <a:lnStyleLst>
+        <a:ln w="12700" cap="flat" cmpd="sng" algn="ctr">
+          <a:solidFill>
+            <a:schemeClr val="phClr"/>
+          </a:solidFill>
+          <a:prstDash val="solid"/>
+          <a:miter lim="800000"/>
+        </a:ln>
+        <a:ln w="19050" cap="flat" cmpd="sng" algn="ctr">
+          <a:solidFill>
+            <a:schemeClr val="phClr"/>
+          </a:solidFill>
+          <a:prstDash val="solid"/>
+          <a:miter lim="800000"/>
+        </a:ln>
+        <a:ln w="25400" cap="flat" cmpd="sng" algn="ctr">
+          <a:solidFill>
+            <a:schemeClr val="phClr"/>
+          </a:solidFill>
+          <a:prstDash val="solid"/>
+          <a:miter lim="800000"/>
+        </a:ln>
+      </a:lnStyleLst>
+      <a:effectStyleLst>
+        <a:effectStyle>
+          <a:effectLst/>
+        </a:effectStyle>
+        <a:effectStyle>
+          <a:effectLst/>
+        </a:effectStyle>
+        <a:effectStyle>
+          <a:effectLst>
+            <a:outerShdw blurRad="57150" dist="19050" dir="5400000" algn="ctr" rotWithShape="0">
+              <a:srgbClr val="000000">
+                <a:alpha val="63000"/>
+              </a:srgbClr>
+            </a:outerShdw>
+          </a:effectLst>
+        </a:effectStyle>
+      </a:effectStyleLst>
+      <a:bgFillStyleLst>
+        <a:solidFill>
+          <a:schemeClr val="phClr"/>
+        </a:solidFill>
+        <a:solidFill>
+          <a:schemeClr val="phClr">
+            <a:tint val="95000"/>
+            <a:satMod val="170000"/>
+          </a:schemeClr>
+        </a:solidFill>
+        <a:gradFill rotWithShape="1">
+          <a:gsLst>
+            <a:gs pos="0">
+              <a:schemeClr val="phClr">
+                <a:tint val="93000"/>
+                <a:satMod val="150000"/>
+                <a:shade val="98000"/>
+                <a:lumMod val="102000"/>
+              </a:schemeClr>
+            </a:gs>
+            <a:gs pos="50000">
+              <a:schemeClr val="phClr">
+                <a:tint val="98000"/>
+                <a:satMod val="130000"/>
+                <a:shade val="90000"/>
+                <a:lumMod val="103000"/>
+              </a:schemeClr>
+            </a:gs>
+            <a:gs pos="100000">
+              <a:schemeClr val="phClr">
+                <a:shade val="63000"/>
+                <a:satMod val="120000"/>
+              </a:schemeClr>
+            </a:gs>
+          </a:gsLst>
+          <a:lin ang="5400000" scaled="0"/>
+        </a:gradFill>
+      </a:bgFillStyleLst>
+    </a:fmtScheme>
+  </a:themeElements>
+  <a:objectDefaults>
+    <a:lnDef>
+      <a:spPr/>
+      <a:bodyPr/>
+      <a:lstStyle/>
+      <a:style>
+        <a:lnRef idx="2">
+          <a:schemeClr val="accent1"/>
+        </a:lnRef>
+        <a:fillRef idx="0">
+          <a:schemeClr val="accent1"/>
+        </a:fillRef>
+        <a:effectRef idx="1">
+          <a:schemeClr val="accent1"/>
+        </a:effectRef>
+        <a:fontRef idx="minor">
+          <a:schemeClr val="tx1"/>
+        </a:fontRef>
+      </a:style>
+    </a:lnDef>
+  </a:objectDefaults>
+  <a:extraClrSchemeLst/>
+  <a:extLst>
+    <a:ext uri="{05A4C25C-085E-4340-85A3-A5531E510DB2}">
+      <thm15:themeFamily xmlns:thm15="http://schemas.microsoft.com/office/thememl/2012/main" name="Office Theme" id="{2E142A2C-CD16-42D6-873A-C26D2A0506FA}" vid="{1BDDFF52-6CD6-40A5-AB3C-68EB2F1E4D0A}"/>
+    </a:ext>
+  </a:extLst>
+</a:theme>
 </file>